--- a/presentation/probability-statistics-course-presentation.pptx
+++ b/presentation/probability-statistics-course-presentation.pptx
@@ -1819,7 +1819,7 @@
                 <a:ea typeface="微软雅黑" pitchFamily="34" charset="-122"/>
                 <a:cs typeface="微软雅黑" pitchFamily="34" charset="-120"/>
               </a:rPr>
-              <a:t>成员：赵浩（U202541916）、章轩睿（U202541911）</a:t>
+              <a:t>成员：赵浩（U202541916）、张璐玺（U202541915）</a:t>
             </a:r>
             <a:endParaRPr lang="en-US" sz="1800" dirty="0"/>
           </a:p>
@@ -1861,6 +1861,114 @@
               <a:t>日期：2026年9月26日</a:t>
             </a:r>
             <a:endParaRPr lang="en-US" sz="1600" dirty="0"/>
+          </a:p>
+        </p:txBody>
+      </p:sp>
+      <p:sp>
+        <p:nvSpPr>
+          <p:cNvPr id="7" name="Rectangle 6"/>
+          <p:cNvSpPr/>
+          <p:nvPr/>
+        </p:nvSpPr>
+        <p:spPr>
+          <a:xfrm>
+            <a:off x="5364480" y="5650992"/>
+            <a:ext cx="1463040" cy="32004"/>
+          </a:xfrm>
+          <a:prstGeom prst="rect">
+            <a:avLst/>
+          </a:prstGeom>
+          <a:solidFill>
+            <a:srgbClr val="B9C6D6"/>
+          </a:solidFill>
+          <a:ln>
+            <a:noFill/>
+          </a:ln>
+          <a:effectLst/>
+        </p:spPr>
+        <p:style>
+          <a:lnRef idx="1">
+            <a:schemeClr val="accent1"/>
+          </a:lnRef>
+          <a:fillRef idx="3">
+            <a:schemeClr val="accent1"/>
+          </a:fillRef>
+          <a:effectRef idx="2">
+            <a:schemeClr val="accent1"/>
+          </a:effectRef>
+          <a:fontRef idx="minor">
+            <a:schemeClr val="lt1"/>
+          </a:fontRef>
+        </p:style>
+        <p:txBody>
+          <a:bodyPr rtlCol="0" anchor="ctr"/>
+          <a:lstStyle/>
+          <a:p/>
+        </p:txBody>
+      </p:sp>
+      <p:sp>
+        <p:nvSpPr>
+          <p:cNvPr id="8" name="Rounded Rectangle 7"/>
+          <p:cNvSpPr/>
+          <p:nvPr/>
+        </p:nvSpPr>
+        <p:spPr>
+          <a:xfrm>
+            <a:off x="4130040" y="5870448"/>
+            <a:ext cx="3931920" cy="603504"/>
+          </a:xfrm>
+          <a:prstGeom prst="roundRect">
+            <a:avLst>
+              <a:gd name="adj" fmla="val 35000"/>
+            </a:avLst>
+          </a:prstGeom>
+          <a:solidFill>
+            <a:srgbClr val="F1F4F8"/>
+          </a:solidFill>
+          <a:ln w="9525">
+            <a:solidFill>
+              <a:srgbClr val="D3DCE7"/>
+            </a:solidFill>
+          </a:ln>
+          <a:effectLst/>
+        </p:spPr>
+        <p:style>
+          <a:lnRef idx="1">
+            <a:schemeClr val="accent1"/>
+          </a:lnRef>
+          <a:fillRef idx="3">
+            <a:schemeClr val="accent1"/>
+          </a:fillRef>
+          <a:effectRef idx="2">
+            <a:schemeClr val="accent1"/>
+          </a:effectRef>
+          <a:fontRef idx="minor">
+            <a:schemeClr val="lt1"/>
+          </a:fontRef>
+        </p:style>
+        <p:txBody>
+          <a:bodyPr rtlCol="0" anchor="ctr" wrap="none" tIns="0" bIns="0" lIns="109728" rIns="109728"/>
+          <a:lstStyle/>
+          <a:p>
+            <a:pPr algn="ctr"/>
+            <a:r>
+              <a:rPr sz="1300" b="0">
+                <a:solidFill>
+                  <a:srgbClr val="6B7686"/>
+                </a:solidFill>
+                <a:latin typeface="微软雅黑"/>
+              </a:rPr>
+              <a:t>汇报人：</a:t>
+            </a:r>
+            <a:r>
+              <a:rPr sz="1700" b="1">
+                <a:solidFill>
+                  <a:srgbClr val="1E3A5F"/>
+                </a:solidFill>
+                <a:latin typeface="微软雅黑"/>
+              </a:rPr>
+              <a:t>张璐玺</a:t>
+            </a:r>
           </a:p>
         </p:txBody>
       </p:sp>

--- a/presentation/probability-statistics-course-presentation.pptx
+++ b/presentation/probability-statistics-course-presentation.pptx
@@ -5,18 +5,18 @@
     <p:sldMasterId id="2147483648" r:id="rId1"/>
   </p:sldMasterIdLst>
   <p:sldIdLst>
-    <p:sldId id="256" r:id="rId7"/>
-    <p:sldId id="257" r:id="rId8"/>
-    <p:sldId id="258" r:id="rId9"/>
-    <p:sldId id="259" r:id="rId10"/>
-    <p:sldId id="260" r:id="rId11"/>
-    <p:sldId id="261" r:id="rId12"/>
-    <p:sldId id="262" r:id="rId13"/>
-    <p:sldId id="263" r:id="rId14"/>
-    <p:sldId id="264" r:id="rId15"/>
-    <p:sldId id="265" r:id="rId16"/>
+    <p:sldId id="256" r:id="rId2"/>
+    <p:sldId id="257" r:id="rId3"/>
+    <p:sldId id="258" r:id="rId4"/>
+    <p:sldId id="259" r:id="rId5"/>
+    <p:sldId id="260" r:id="rId6"/>
+    <p:sldId id="261" r:id="rId7"/>
+    <p:sldId id="262" r:id="rId8"/>
+    <p:sldId id="263" r:id="rId9"/>
+    <p:sldId id="264" r:id="rId10"/>
+    <p:sldId id="265" r:id="rId11"/>
   </p:sldIdLst>
-  <p:sldSz cx="12191969" cy="6858000" type="screen4x3"/>
+  <p:sldSz cx="12192000" cy="6858000"/>
   <p:notesSz cx="6858000" cy="9144000"/>
   <p:defaultTextStyle>
     <a:defPPr>
@@ -113,6 +113,22 @@
       </a:defRPr>
     </a:lvl9pPr>
   </p:defaultTextStyle>
+  <p:extLst>
+    <p:ext uri="{EFAFB233-063F-42B5-8137-9DF3F51BA10A}">
+      <p15:sldGuideLst xmlns:p15="http://schemas.microsoft.com/office/powerpoint/2012/main">
+        <p15:guide id="1" orient="horz" pos="2160">
+          <p15:clr>
+            <a:srgbClr val="A4A3A4"/>
+          </p15:clr>
+        </p15:guide>
+        <p15:guide id="2" pos="2880">
+          <p15:clr>
+            <a:srgbClr val="A4A3A4"/>
+          </p15:clr>
+        </p15:guide>
+      </p15:sldGuideLst>
+    </p:ext>
+  </p:extLst>
 </p:presentation>
 </file>
 
@@ -154,10 +170,9 @@
           <a:lstStyle/>
           <a:p>
             <a:r>
-              <a:rPr lang="en-US" smtClean="0"/>
+              <a:rPr lang="en-US"/>
               <a:t>Click to edit Master title style</a:t>
             </a:r>
-            <a:endParaRPr lang="en-US"/>
           </a:p>
         </p:txBody>
       </p:sp>
@@ -273,10 +288,9 @@
           </a:lstStyle>
           <a:p>
             <a:r>
-              <a:rPr lang="en-US" smtClean="0"/>
+              <a:rPr lang="en-US"/>
               <a:t>Click to edit Master subtitle style</a:t>
             </a:r>
-            <a:endParaRPr lang="en-US"/>
           </a:p>
         </p:txBody>
       </p:sp>
@@ -297,7 +311,7 @@
           <a:p>
             <a:fld id="{5BCAD085-E8A6-8845-BD4E-CB4CCA059FC4}" type="datetimeFigureOut">
               <a:rPr lang="en-US" smtClean="0"/>
-              <a:t>1/27/13</a:t>
+              <a:t>9/26/2026</a:t>
             </a:fld>
             <a:endParaRPr lang="en-US"/>
           </a:p>
@@ -391,10 +405,9 @@
           <a:lstStyle/>
           <a:p>
             <a:r>
-              <a:rPr lang="en-US" smtClean="0"/>
+              <a:rPr lang="en-US"/>
               <a:t>Click to edit Master title style</a:t>
             </a:r>
-            <a:endParaRPr lang="en-US"/>
           </a:p>
         </p:txBody>
       </p:sp>
@@ -415,38 +428,37 @@
           <a:p>
             <a:pPr lvl="0"/>
             <a:r>
-              <a:rPr lang="en-US" smtClean="0"/>
+              <a:rPr lang="en-US"/>
               <a:t>Click to edit Master text styles</a:t>
             </a:r>
           </a:p>
           <a:p>
             <a:pPr lvl="1"/>
             <a:r>
-              <a:rPr lang="en-US" smtClean="0"/>
+              <a:rPr lang="en-US"/>
               <a:t>Second level</a:t>
             </a:r>
           </a:p>
           <a:p>
             <a:pPr lvl="2"/>
             <a:r>
-              <a:rPr lang="en-US" smtClean="0"/>
+              <a:rPr lang="en-US"/>
               <a:t>Third level</a:t>
             </a:r>
           </a:p>
           <a:p>
             <a:pPr lvl="3"/>
             <a:r>
-              <a:rPr lang="en-US" smtClean="0"/>
+              <a:rPr lang="en-US"/>
               <a:t>Fourth level</a:t>
             </a:r>
           </a:p>
           <a:p>
             <a:pPr lvl="4"/>
             <a:r>
-              <a:rPr lang="en-US" smtClean="0"/>
+              <a:rPr lang="en-US"/>
               <a:t>Fifth level</a:t>
             </a:r>
-            <a:endParaRPr lang="en-US"/>
           </a:p>
         </p:txBody>
       </p:sp>
@@ -467,7 +479,7 @@
           <a:p>
             <a:fld id="{5BCAD085-E8A6-8845-BD4E-CB4CCA059FC4}" type="datetimeFigureOut">
               <a:rPr lang="en-US" smtClean="0"/>
-              <a:t>1/27/13</a:t>
+              <a:t>9/26/2026</a:t>
             </a:fld>
             <a:endParaRPr lang="en-US"/>
           </a:p>
@@ -566,10 +578,9 @@
           <a:lstStyle/>
           <a:p>
             <a:r>
-              <a:rPr lang="en-US" smtClean="0"/>
+              <a:rPr lang="en-US"/>
               <a:t>Click to edit Master title style</a:t>
             </a:r>
-            <a:endParaRPr lang="en-US"/>
           </a:p>
         </p:txBody>
       </p:sp>
@@ -595,38 +606,37 @@
           <a:p>
             <a:pPr lvl="0"/>
             <a:r>
-              <a:rPr lang="en-US" smtClean="0"/>
+              <a:rPr lang="en-US"/>
               <a:t>Click to edit Master text styles</a:t>
             </a:r>
           </a:p>
           <a:p>
             <a:pPr lvl="1"/>
             <a:r>
-              <a:rPr lang="en-US" smtClean="0"/>
+              <a:rPr lang="en-US"/>
               <a:t>Second level</a:t>
             </a:r>
           </a:p>
           <a:p>
             <a:pPr lvl="2"/>
             <a:r>
-              <a:rPr lang="en-US" smtClean="0"/>
+              <a:rPr lang="en-US"/>
               <a:t>Third level</a:t>
             </a:r>
           </a:p>
           <a:p>
             <a:pPr lvl="3"/>
             <a:r>
-              <a:rPr lang="en-US" smtClean="0"/>
+              <a:rPr lang="en-US"/>
               <a:t>Fourth level</a:t>
             </a:r>
           </a:p>
           <a:p>
             <a:pPr lvl="4"/>
             <a:r>
-              <a:rPr lang="en-US" smtClean="0"/>
+              <a:rPr lang="en-US"/>
               <a:t>Fifth level</a:t>
             </a:r>
-            <a:endParaRPr lang="en-US"/>
           </a:p>
         </p:txBody>
       </p:sp>
@@ -647,7 +657,7 @@
           <a:p>
             <a:fld id="{5BCAD085-E8A6-8845-BD4E-CB4CCA059FC4}" type="datetimeFigureOut">
               <a:rPr lang="en-US" smtClean="0"/>
-              <a:t>1/27/13</a:t>
+              <a:t>9/26/2026</a:t>
             </a:fld>
             <a:endParaRPr lang="en-US"/>
           </a:p>
@@ -741,10 +751,9 @@
           <a:lstStyle/>
           <a:p>
             <a:r>
-              <a:rPr lang="en-US" smtClean="0"/>
+              <a:rPr lang="en-US"/>
               <a:t>Click to edit Master title style</a:t>
             </a:r>
-            <a:endParaRPr lang="en-US"/>
           </a:p>
         </p:txBody>
       </p:sp>
@@ -765,38 +774,37 @@
           <a:p>
             <a:pPr lvl="0"/>
             <a:r>
-              <a:rPr lang="en-US" smtClean="0"/>
+              <a:rPr lang="en-US"/>
               <a:t>Click to edit Master text styles</a:t>
             </a:r>
           </a:p>
           <a:p>
             <a:pPr lvl="1"/>
             <a:r>
-              <a:rPr lang="en-US" smtClean="0"/>
+              <a:rPr lang="en-US"/>
               <a:t>Second level</a:t>
             </a:r>
           </a:p>
           <a:p>
             <a:pPr lvl="2"/>
             <a:r>
-              <a:rPr lang="en-US" smtClean="0"/>
+              <a:rPr lang="en-US"/>
               <a:t>Third level</a:t>
             </a:r>
           </a:p>
           <a:p>
             <a:pPr lvl="3"/>
             <a:r>
-              <a:rPr lang="en-US" smtClean="0"/>
+              <a:rPr lang="en-US"/>
               <a:t>Fourth level</a:t>
             </a:r>
           </a:p>
           <a:p>
             <a:pPr lvl="4"/>
             <a:r>
-              <a:rPr lang="en-US" smtClean="0"/>
+              <a:rPr lang="en-US"/>
               <a:t>Fifth level</a:t>
             </a:r>
-            <a:endParaRPr lang="en-US"/>
           </a:p>
         </p:txBody>
       </p:sp>
@@ -817,7 +825,7 @@
           <a:p>
             <a:fld id="{5BCAD085-E8A6-8845-BD4E-CB4CCA059FC4}" type="datetimeFigureOut">
               <a:rPr lang="en-US" smtClean="0"/>
-              <a:t>1/27/13</a:t>
+              <a:t>9/26/2026</a:t>
             </a:fld>
             <a:endParaRPr lang="en-US"/>
           </a:p>
@@ -920,10 +928,9 @@
           </a:lstStyle>
           <a:p>
             <a:r>
-              <a:rPr lang="en-US" smtClean="0"/>
+              <a:rPr lang="en-US"/>
               <a:t>Click to edit Master title style</a:t>
             </a:r>
-            <a:endParaRPr lang="en-US"/>
           </a:p>
         </p:txBody>
       </p:sp>
@@ -1040,7 +1047,7 @@
           <a:p>
             <a:pPr lvl="0"/>
             <a:r>
-              <a:rPr lang="en-US" smtClean="0"/>
+              <a:rPr lang="en-US"/>
               <a:t>Click to edit Master text styles</a:t>
             </a:r>
           </a:p>
@@ -1063,7 +1070,7 @@
           <a:p>
             <a:fld id="{5BCAD085-E8A6-8845-BD4E-CB4CCA059FC4}" type="datetimeFigureOut">
               <a:rPr lang="en-US" smtClean="0"/>
-              <a:t>1/27/13</a:t>
+              <a:t>9/26/2026</a:t>
             </a:fld>
             <a:endParaRPr lang="en-US"/>
           </a:p>
@@ -1157,10 +1164,9 @@
           <a:lstStyle/>
           <a:p>
             <a:r>
-              <a:rPr lang="en-US" smtClean="0"/>
+              <a:rPr lang="en-US"/>
               <a:t>Click to edit Master title style</a:t>
             </a:r>
-            <a:endParaRPr lang="en-US"/>
           </a:p>
         </p:txBody>
       </p:sp>
@@ -1214,38 +1220,37 @@
           <a:p>
             <a:pPr lvl="0"/>
             <a:r>
-              <a:rPr lang="en-US" smtClean="0"/>
+              <a:rPr lang="en-US"/>
               <a:t>Click to edit Master text styles</a:t>
             </a:r>
           </a:p>
           <a:p>
             <a:pPr lvl="1"/>
             <a:r>
-              <a:rPr lang="en-US" smtClean="0"/>
+              <a:rPr lang="en-US"/>
               <a:t>Second level</a:t>
             </a:r>
           </a:p>
           <a:p>
             <a:pPr lvl="2"/>
             <a:r>
-              <a:rPr lang="en-US" smtClean="0"/>
+              <a:rPr lang="en-US"/>
               <a:t>Third level</a:t>
             </a:r>
           </a:p>
           <a:p>
             <a:pPr lvl="3"/>
             <a:r>
-              <a:rPr lang="en-US" smtClean="0"/>
+              <a:rPr lang="en-US"/>
               <a:t>Fourth level</a:t>
             </a:r>
           </a:p>
           <a:p>
             <a:pPr lvl="4"/>
             <a:r>
-              <a:rPr lang="en-US" smtClean="0"/>
+              <a:rPr lang="en-US"/>
               <a:t>Fifth level</a:t>
             </a:r>
-            <a:endParaRPr lang="en-US"/>
           </a:p>
         </p:txBody>
       </p:sp>
@@ -1299,38 +1304,37 @@
           <a:p>
             <a:pPr lvl="0"/>
             <a:r>
-              <a:rPr lang="en-US" smtClean="0"/>
+              <a:rPr lang="en-US"/>
               <a:t>Click to edit Master text styles</a:t>
             </a:r>
           </a:p>
           <a:p>
             <a:pPr lvl="1"/>
             <a:r>
-              <a:rPr lang="en-US" smtClean="0"/>
+              <a:rPr lang="en-US"/>
               <a:t>Second level</a:t>
             </a:r>
           </a:p>
           <a:p>
             <a:pPr lvl="2"/>
             <a:r>
-              <a:rPr lang="en-US" smtClean="0"/>
+              <a:rPr lang="en-US"/>
               <a:t>Third level</a:t>
             </a:r>
           </a:p>
           <a:p>
             <a:pPr lvl="3"/>
             <a:r>
-              <a:rPr lang="en-US" smtClean="0"/>
+              <a:rPr lang="en-US"/>
               <a:t>Fourth level</a:t>
             </a:r>
           </a:p>
           <a:p>
             <a:pPr lvl="4"/>
             <a:r>
-              <a:rPr lang="en-US" smtClean="0"/>
+              <a:rPr lang="en-US"/>
               <a:t>Fifth level</a:t>
             </a:r>
-            <a:endParaRPr lang="en-US"/>
           </a:p>
         </p:txBody>
       </p:sp>
@@ -1351,7 +1355,7 @@
           <a:p>
             <a:fld id="{5BCAD085-E8A6-8845-BD4E-CB4CCA059FC4}" type="datetimeFigureOut">
               <a:rPr lang="en-US" smtClean="0"/>
-              <a:t>1/27/13</a:t>
+              <a:t>9/26/2026</a:t>
             </a:fld>
             <a:endParaRPr lang="en-US"/>
           </a:p>
@@ -1449,10 +1453,9 @@
           </a:lstStyle>
           <a:p>
             <a:r>
-              <a:rPr lang="en-US" smtClean="0"/>
+              <a:rPr lang="en-US"/>
               <a:t>Click to edit Master title style</a:t>
             </a:r>
-            <a:endParaRPr lang="en-US"/>
           </a:p>
         </p:txBody>
       </p:sp>
@@ -1515,7 +1518,7 @@
           <a:p>
             <a:pPr lvl="0"/>
             <a:r>
-              <a:rPr lang="en-US" smtClean="0"/>
+              <a:rPr lang="en-US"/>
               <a:t>Click to edit Master text styles</a:t>
             </a:r>
           </a:p>
@@ -1571,38 +1574,37 @@
           <a:p>
             <a:pPr lvl="0"/>
             <a:r>
-              <a:rPr lang="en-US" smtClean="0"/>
+              <a:rPr lang="en-US"/>
               <a:t>Click to edit Master text styles</a:t>
             </a:r>
           </a:p>
           <a:p>
             <a:pPr lvl="1"/>
             <a:r>
-              <a:rPr lang="en-US" smtClean="0"/>
+              <a:rPr lang="en-US"/>
               <a:t>Second level</a:t>
             </a:r>
           </a:p>
           <a:p>
             <a:pPr lvl="2"/>
             <a:r>
-              <a:rPr lang="en-US" smtClean="0"/>
+              <a:rPr lang="en-US"/>
               <a:t>Third level</a:t>
             </a:r>
           </a:p>
           <a:p>
             <a:pPr lvl="3"/>
             <a:r>
-              <a:rPr lang="en-US" smtClean="0"/>
+              <a:rPr lang="en-US"/>
               <a:t>Fourth level</a:t>
             </a:r>
           </a:p>
           <a:p>
             <a:pPr lvl="4"/>
             <a:r>
-              <a:rPr lang="en-US" smtClean="0"/>
+              <a:rPr lang="en-US"/>
               <a:t>Fifth level</a:t>
             </a:r>
-            <a:endParaRPr lang="en-US"/>
           </a:p>
         </p:txBody>
       </p:sp>
@@ -1665,7 +1667,7 @@
           <a:p>
             <a:pPr lvl="0"/>
             <a:r>
-              <a:rPr lang="en-US" smtClean="0"/>
+              <a:rPr lang="en-US"/>
               <a:t>Click to edit Master text styles</a:t>
             </a:r>
           </a:p>
@@ -1721,38 +1723,37 @@
           <a:p>
             <a:pPr lvl="0"/>
             <a:r>
-              <a:rPr lang="en-US" smtClean="0"/>
+              <a:rPr lang="en-US"/>
               <a:t>Click to edit Master text styles</a:t>
             </a:r>
           </a:p>
           <a:p>
             <a:pPr lvl="1"/>
             <a:r>
-              <a:rPr lang="en-US" smtClean="0"/>
+              <a:rPr lang="en-US"/>
               <a:t>Second level</a:t>
             </a:r>
           </a:p>
           <a:p>
             <a:pPr lvl="2"/>
             <a:r>
-              <a:rPr lang="en-US" smtClean="0"/>
+              <a:rPr lang="en-US"/>
               <a:t>Third level</a:t>
             </a:r>
           </a:p>
           <a:p>
             <a:pPr lvl="3"/>
             <a:r>
-              <a:rPr lang="en-US" smtClean="0"/>
+              <a:rPr lang="en-US"/>
               <a:t>Fourth level</a:t>
             </a:r>
           </a:p>
           <a:p>
             <a:pPr lvl="4"/>
             <a:r>
-              <a:rPr lang="en-US" smtClean="0"/>
+              <a:rPr lang="en-US"/>
               <a:t>Fifth level</a:t>
             </a:r>
-            <a:endParaRPr lang="en-US"/>
           </a:p>
         </p:txBody>
       </p:sp>
@@ -1773,7 +1774,7 @@
           <a:p>
             <a:fld id="{5BCAD085-E8A6-8845-BD4E-CB4CCA059FC4}" type="datetimeFigureOut">
               <a:rPr lang="en-US" smtClean="0"/>
-              <a:t>1/27/13</a:t>
+              <a:t>9/26/2026</a:t>
             </a:fld>
             <a:endParaRPr lang="en-US"/>
           </a:p>
@@ -1867,10 +1868,9 @@
           <a:lstStyle/>
           <a:p>
             <a:r>
-              <a:rPr lang="en-US" smtClean="0"/>
+              <a:rPr lang="en-US"/>
               <a:t>Click to edit Master title style</a:t>
             </a:r>
-            <a:endParaRPr lang="en-US"/>
           </a:p>
         </p:txBody>
       </p:sp>
@@ -1891,7 +1891,7 @@
           <a:p>
             <a:fld id="{5BCAD085-E8A6-8845-BD4E-CB4CCA059FC4}" type="datetimeFigureOut">
               <a:rPr lang="en-US" smtClean="0"/>
-              <a:t>1/27/13</a:t>
+              <a:t>9/26/2026</a:t>
             </a:fld>
             <a:endParaRPr lang="en-US"/>
           </a:p>
@@ -1986,7 +1986,7 @@
           <a:p>
             <a:fld id="{5BCAD085-E8A6-8845-BD4E-CB4CCA059FC4}" type="datetimeFigureOut">
               <a:rPr lang="en-US" smtClean="0"/>
-              <a:t>1/27/13</a:t>
+              <a:t>9/26/2026</a:t>
             </a:fld>
             <a:endParaRPr lang="en-US"/>
           </a:p>
@@ -2089,10 +2089,9 @@
           </a:lstStyle>
           <a:p>
             <a:r>
-              <a:rPr lang="en-US" smtClean="0"/>
+              <a:rPr lang="en-US"/>
               <a:t>Click to edit Master title style</a:t>
             </a:r>
-            <a:endParaRPr lang="en-US"/>
           </a:p>
         </p:txBody>
       </p:sp>
@@ -2146,38 +2145,37 @@
           <a:p>
             <a:pPr lvl="0"/>
             <a:r>
-              <a:rPr lang="en-US" smtClean="0"/>
+              <a:rPr lang="en-US"/>
               <a:t>Click to edit Master text styles</a:t>
             </a:r>
           </a:p>
           <a:p>
             <a:pPr lvl="1"/>
             <a:r>
-              <a:rPr lang="en-US" smtClean="0"/>
+              <a:rPr lang="en-US"/>
               <a:t>Second level</a:t>
             </a:r>
           </a:p>
           <a:p>
             <a:pPr lvl="2"/>
             <a:r>
-              <a:rPr lang="en-US" smtClean="0"/>
+              <a:rPr lang="en-US"/>
               <a:t>Third level</a:t>
             </a:r>
           </a:p>
           <a:p>
             <a:pPr lvl="3"/>
             <a:r>
-              <a:rPr lang="en-US" smtClean="0"/>
+              <a:rPr lang="en-US"/>
               <a:t>Fourth level</a:t>
             </a:r>
           </a:p>
           <a:p>
             <a:pPr lvl="4"/>
             <a:r>
-              <a:rPr lang="en-US" smtClean="0"/>
+              <a:rPr lang="en-US"/>
               <a:t>Fifth level</a:t>
             </a:r>
-            <a:endParaRPr lang="en-US"/>
           </a:p>
         </p:txBody>
       </p:sp>
@@ -2240,7 +2238,7 @@
           <a:p>
             <a:pPr lvl="0"/>
             <a:r>
-              <a:rPr lang="en-US" smtClean="0"/>
+              <a:rPr lang="en-US"/>
               <a:t>Click to edit Master text styles</a:t>
             </a:r>
           </a:p>
@@ -2263,7 +2261,7 @@
           <a:p>
             <a:fld id="{5BCAD085-E8A6-8845-BD4E-CB4CCA059FC4}" type="datetimeFigureOut">
               <a:rPr lang="en-US" smtClean="0"/>
-              <a:t>1/27/13</a:t>
+              <a:t>9/26/2026</a:t>
             </a:fld>
             <a:endParaRPr lang="en-US"/>
           </a:p>
@@ -2366,10 +2364,9 @@
           </a:lstStyle>
           <a:p>
             <a:r>
-              <a:rPr lang="en-US" smtClean="0"/>
+              <a:rPr lang="en-US"/>
               <a:t>Click to edit Master title style</a:t>
             </a:r>
-            <a:endParaRPr lang="en-US"/>
           </a:p>
         </p:txBody>
       </p:sp>
@@ -2493,7 +2490,7 @@
           <a:p>
             <a:pPr lvl="0"/>
             <a:r>
-              <a:rPr lang="en-US" smtClean="0"/>
+              <a:rPr lang="en-US"/>
               <a:t>Click to edit Master text styles</a:t>
             </a:r>
           </a:p>
@@ -2516,7 +2513,7 @@
           <a:p>
             <a:fld id="{5BCAD085-E8A6-8845-BD4E-CB4CCA059FC4}" type="datetimeFigureOut">
               <a:rPr lang="en-US" smtClean="0"/>
-              <a:t>1/27/13</a:t>
+              <a:t>9/26/2026</a:t>
             </a:fld>
             <a:endParaRPr lang="en-US"/>
           </a:p>
@@ -2625,10 +2622,9 @@
           <a:lstStyle/>
           <a:p>
             <a:r>
-              <a:rPr lang="en-US" smtClean="0"/>
+              <a:rPr lang="en-US"/>
               <a:t>Click to edit Master title style</a:t>
             </a:r>
-            <a:endParaRPr lang="en-US"/>
           </a:p>
         </p:txBody>
       </p:sp>
@@ -2659,38 +2655,37 @@
           <a:p>
             <a:pPr lvl="0"/>
             <a:r>
-              <a:rPr lang="en-US" smtClean="0"/>
+              <a:rPr lang="en-US"/>
               <a:t>Click to edit Master text styles</a:t>
             </a:r>
           </a:p>
           <a:p>
             <a:pPr lvl="1"/>
             <a:r>
-              <a:rPr lang="en-US" smtClean="0"/>
+              <a:rPr lang="en-US"/>
               <a:t>Second level</a:t>
             </a:r>
           </a:p>
           <a:p>
             <a:pPr lvl="2"/>
             <a:r>
-              <a:rPr lang="en-US" smtClean="0"/>
+              <a:rPr lang="en-US"/>
               <a:t>Third level</a:t>
             </a:r>
           </a:p>
           <a:p>
             <a:pPr lvl="3"/>
             <a:r>
-              <a:rPr lang="en-US" smtClean="0"/>
+              <a:rPr lang="en-US"/>
               <a:t>Fourth level</a:t>
             </a:r>
           </a:p>
           <a:p>
             <a:pPr lvl="4"/>
             <a:r>
-              <a:rPr lang="en-US" smtClean="0"/>
+              <a:rPr lang="en-US"/>
               <a:t>Fifth level</a:t>
             </a:r>
-            <a:endParaRPr lang="en-US"/>
           </a:p>
         </p:txBody>
       </p:sp>
@@ -2729,7 +2724,7 @@
           <a:p>
             <a:fld id="{5BCAD085-E8A6-8845-BD4E-CB4CCA059FC4}" type="datetimeFigureOut">
               <a:rPr lang="en-US" smtClean="0"/>
-              <a:t>1/27/13</a:t>
+              <a:t>9/26/2026</a:t>
             </a:fld>
             <a:endParaRPr lang="en-US"/>
           </a:p>
@@ -3088,7 +3083,7 @@
 </file>
 
 <file path=ppt/slides/slide1.xml><?xml version="1.0" encoding="utf-8"?>
-<p:sld xmlns:a="http://schemas.openxmlformats.org/drawingml/2006/main" xmlns:p="http://schemas.openxmlformats.org/presentationml/2006/main" xmlns:r="http://schemas.openxmlformats.org/officeDocument/2006/relationships">
+<p:sld xmlns:a="http://schemas.openxmlformats.org/drawingml/2006/main" xmlns:r="http://schemas.openxmlformats.org/officeDocument/2006/relationships" xmlns:p="http://schemas.openxmlformats.org/presentationml/2006/main">
   <p:cSld>
     <p:spTree>
       <p:nvGrpSpPr>
@@ -3096,7 +3091,14 @@
         <p:cNvGrpSpPr/>
         <p:nvPr/>
       </p:nvGrpSpPr>
-      <p:grpSpPr/>
+      <p:grpSpPr>
+        <a:xfrm>
+          <a:off x="0" y="0"/>
+          <a:ext cx="0" cy="0"/>
+          <a:chOff x="0" y="0"/>
+          <a:chExt cx="0" cy="0"/>
+        </a:xfrm>
+      </p:grpSpPr>
       <p:pic>
         <p:nvPicPr>
           <p:cNvPr id="2" name="Picture 1" descr="cover_curve.png"/>
@@ -3138,7 +3140,7 @@
           <a:noFill/>
         </p:spPr>
         <p:txBody>
-          <a:bodyPr wrap="square" lIns="0" rIns="0" tIns="0" bIns="0" anchor="t">
+          <a:bodyPr wrap="square" lIns="0" tIns="0" rIns="0" bIns="0" anchor="t">
             <a:spAutoFit/>
           </a:bodyPr>
           <a:lstStyle/>
@@ -3173,7 +3175,7 @@
           <a:noFill/>
         </p:spPr>
         <p:txBody>
-          <a:bodyPr wrap="square" lIns="0" rIns="0" tIns="0" bIns="0" anchor="ctr">
+          <a:bodyPr wrap="square" lIns="0" tIns="0" rIns="0" bIns="0" anchor="ctr">
             <a:spAutoFit/>
           </a:bodyPr>
           <a:lstStyle/>
@@ -3208,7 +3210,7 @@
           <a:noFill/>
         </p:spPr>
         <p:txBody>
-          <a:bodyPr wrap="square" lIns="0" rIns="0" tIns="0" bIns="0" anchor="ctr">
+          <a:bodyPr wrap="square" lIns="0" tIns="0" rIns="0" bIns="0" anchor="ctr">
             <a:spAutoFit/>
           </a:bodyPr>
           <a:lstStyle/>
@@ -3265,7 +3267,9 @@
         <p:txBody>
           <a:bodyPr rtlCol="0" anchor="ctr"/>
           <a:lstStyle/>
-          <a:p/>
+          <a:p>
+            <a:endParaRPr/>
+          </a:p>
         </p:txBody>
       </p:sp>
       <p:sp>
@@ -3276,23 +3280,23 @@
         </p:nvSpPr>
         <p:spPr>
           <a:xfrm>
-            <a:off x="1224975" y="4443984"/>
-            <a:ext cx="5074920" cy="868680"/>
-          </a:xfrm>
-          <a:prstGeom prst="rect">
-            <a:avLst/>
-          </a:prstGeom>
-          <a:noFill/>
-        </p:spPr>
-        <p:txBody>
-          <a:bodyPr wrap="square" lIns="0" rIns="0" tIns="0" bIns="0" anchor="ctr">
+            <a:off x="2138650" y="4536369"/>
+            <a:ext cx="5074920" cy="592470"/>
+          </a:xfrm>
+          <a:prstGeom prst="rect">
+            <a:avLst/>
+          </a:prstGeom>
+          <a:noFill/>
+        </p:spPr>
+        <p:txBody>
+          <a:bodyPr wrap="square" lIns="0" tIns="0" rIns="0" bIns="0" anchor="ctr">
             <a:spAutoFit/>
           </a:bodyPr>
           <a:lstStyle/>
           <a:p>
             <a:pPr algn="l"/>
             <a:r>
-              <a:rPr sz="1050" b="0">
+              <a:rPr sz="1050" b="0" dirty="0">
                 <a:solidFill>
                   <a:srgbClr val="6E7A8A"/>
                 </a:solidFill>
@@ -3304,13 +3308,31 @@
           <a:p>
             <a:pPr algn="l"/>
             <a:r>
-              <a:rPr sz="1400" b="0">
+              <a:rPr sz="1400" b="0" dirty="0">
                 <a:solidFill>
                   <a:srgbClr val="14263C"/>
                 </a:solidFill>
                 <a:latin typeface="微软雅黑"/>
               </a:rPr>
-              <a:t>赵浩（U202541916）　张璐玺（U202541915）</a:t>
+              <a:t>赵浩（U202541916）　</a:t>
+            </a:r>
+            <a:endParaRPr lang="en-US" sz="1400" b="0" dirty="0">
+              <a:solidFill>
+                <a:srgbClr val="14263C"/>
+              </a:solidFill>
+              <a:latin typeface="微软雅黑"/>
+            </a:endParaRPr>
+          </a:p>
+          <a:p>
+            <a:pPr algn="l"/>
+            <a:r>
+              <a:rPr sz="1400" b="0" dirty="0">
+                <a:solidFill>
+                  <a:srgbClr val="14263C"/>
+                </a:solidFill>
+                <a:latin typeface="微软雅黑"/>
+              </a:rPr>
+              <a:t>张璐玺（U202541915）</a:t>
             </a:r>
           </a:p>
         </p:txBody>
@@ -3354,7 +3376,9 @@
         <p:txBody>
           <a:bodyPr rtlCol="0" anchor="ctr"/>
           <a:lstStyle/>
-          <a:p/>
+          <a:p>
+            <a:endParaRPr/>
+          </a:p>
         </p:txBody>
       </p:sp>
       <p:sp>
@@ -3365,7 +3389,7 @@
         </p:nvSpPr>
         <p:spPr>
           <a:xfrm>
-            <a:off x="6530324" y="4443984"/>
+            <a:off x="7608764" y="4428141"/>
             <a:ext cx="1874519" cy="868680"/>
           </a:xfrm>
           <a:prstGeom prst="rect">
@@ -3374,26 +3398,35 @@
           <a:noFill/>
         </p:spPr>
         <p:txBody>
-          <a:bodyPr wrap="square" lIns="0" rIns="0" tIns="0" bIns="0" anchor="ctr">
+          <a:bodyPr wrap="square" lIns="0" tIns="0" rIns="0" bIns="0" anchor="ctr">
             <a:spAutoFit/>
           </a:bodyPr>
           <a:lstStyle/>
           <a:p>
             <a:pPr algn="l"/>
             <a:r>
-              <a:rPr sz="1050" b="1">
+              <a:rPr sz="1050" b="1" dirty="0" err="1">
                 <a:solidFill>
                   <a:srgbClr val="1B3A6B"/>
                 </a:solidFill>
                 <a:latin typeface="微软雅黑"/>
               </a:rPr>
-              <a:t>汇报人：</a:t>
+              <a:t>汇报人</a:t>
+            </a:r>
+            <a:r>
+              <a:rPr sz="1050" b="1" dirty="0">
+                <a:solidFill>
+                  <a:srgbClr val="1B3A6B"/>
+                </a:solidFill>
+                <a:latin typeface="微软雅黑"/>
+              </a:rPr>
+              <a:t>：</a:t>
             </a:r>
           </a:p>
           <a:p>
             <a:pPr algn="l"/>
             <a:r>
-              <a:rPr sz="1700" b="1">
+              <a:rPr sz="1700" b="1" dirty="0" err="1">
                 <a:solidFill>
                   <a:srgbClr val="1B3A6B"/>
                 </a:solidFill>
@@ -3401,6 +3434,12 @@
               </a:rPr>
               <a:t>张璐玺</a:t>
             </a:r>
+            <a:endParaRPr sz="1700" b="1" dirty="0">
+              <a:solidFill>
+                <a:srgbClr val="1B3A6B"/>
+              </a:solidFill>
+              <a:latin typeface="微软雅黑"/>
+            </a:endParaRPr>
           </a:p>
         </p:txBody>
       </p:sp>
@@ -3443,53 +3482,8 @@
         <p:txBody>
           <a:bodyPr rtlCol="0" anchor="ctr"/>
           <a:lstStyle/>
-          <a:p/>
-        </p:txBody>
-      </p:sp>
-      <p:sp>
-        <p:nvSpPr>
-          <p:cNvPr id="11" name="TextBox 10"/>
-          <p:cNvSpPr txBox="1"/>
-          <p:nvPr/>
-        </p:nvSpPr>
-        <p:spPr>
-          <a:xfrm>
-            <a:off x="8635273" y="4443984"/>
-            <a:ext cx="2331720" cy="868680"/>
-          </a:xfrm>
-          <a:prstGeom prst="rect">
-            <a:avLst/>
-          </a:prstGeom>
-          <a:noFill/>
-        </p:spPr>
-        <p:txBody>
-          <a:bodyPr wrap="square" lIns="0" rIns="0" tIns="0" bIns="0" anchor="ctr">
-            <a:spAutoFit/>
-          </a:bodyPr>
-          <a:lstStyle/>
-          <a:p>
-            <a:pPr algn="l"/>
-            <a:r>
-              <a:rPr sz="1050" b="0">
-                <a:solidFill>
-                  <a:srgbClr val="6E7A8A"/>
-                </a:solidFill>
-                <a:latin typeface="微软雅黑"/>
-              </a:rPr>
-              <a:t>日　期</a:t>
-            </a:r>
-          </a:p>
-          <a:p>
-            <a:pPr algn="l"/>
-            <a:r>
-              <a:rPr sz="1400" b="0">
-                <a:solidFill>
-                  <a:srgbClr val="14263C"/>
-                </a:solidFill>
-                <a:latin typeface="微软雅黑"/>
-              </a:rPr>
-              <a:t>2026年9月26日</a:t>
-            </a:r>
+          <a:p>
+            <a:endParaRPr/>
           </a:p>
         </p:txBody>
       </p:sp>
@@ -3502,7 +3496,7 @@
 </file>
 
 <file path=ppt/slides/slide10.xml><?xml version="1.0" encoding="utf-8"?>
-<p:sld xmlns:a="http://schemas.openxmlformats.org/drawingml/2006/main" xmlns:p="http://schemas.openxmlformats.org/presentationml/2006/main" xmlns:r="http://schemas.openxmlformats.org/officeDocument/2006/relationships">
+<p:sld xmlns:a="http://schemas.openxmlformats.org/drawingml/2006/main" xmlns:r="http://schemas.openxmlformats.org/officeDocument/2006/relationships" xmlns:p="http://schemas.openxmlformats.org/presentationml/2006/main">
   <p:cSld>
     <p:spTree>
       <p:nvGrpSpPr>
@@ -3510,7 +3504,14 @@
         <p:cNvGrpSpPr/>
         <p:nvPr/>
       </p:nvGrpSpPr>
-      <p:grpSpPr/>
+      <p:grpSpPr>
+        <a:xfrm>
+          <a:off x="0" y="0"/>
+          <a:ext cx="0" cy="0"/>
+          <a:chOff x="0" y="0"/>
+          <a:chExt cx="0" cy="0"/>
+        </a:xfrm>
+      </p:grpSpPr>
       <p:sp>
         <p:nvSpPr>
           <p:cNvPr id="2" name="TextBox 1"/>
@@ -3528,7 +3529,7 @@
           <a:noFill/>
         </p:spPr>
         <p:txBody>
-          <a:bodyPr wrap="square" lIns="0" rIns="0" tIns="0" bIns="0" anchor="t">
+          <a:bodyPr wrap="square" lIns="0" tIns="0" rIns="0" bIns="0" anchor="t">
             <a:spAutoFit/>
           </a:bodyPr>
           <a:lstStyle/>
@@ -3563,7 +3564,7 @@
           <a:noFill/>
         </p:spPr>
         <p:txBody>
-          <a:bodyPr wrap="square" lIns="0" rIns="0" tIns="0" bIns="0" anchor="t">
+          <a:bodyPr wrap="square" lIns="0" tIns="0" rIns="0" bIns="0" anchor="t">
             <a:spAutoFit/>
           </a:bodyPr>
           <a:lstStyle/>
@@ -3620,7 +3621,9 @@
         <p:txBody>
           <a:bodyPr rtlCol="0" anchor="ctr"/>
           <a:lstStyle/>
-          <a:p/>
+          <a:p>
+            <a:endParaRPr/>
+          </a:p>
         </p:txBody>
       </p:sp>
       <p:sp>
@@ -3662,7 +3665,9 @@
         <p:txBody>
           <a:bodyPr rtlCol="0" anchor="ctr"/>
           <a:lstStyle/>
-          <a:p/>
+          <a:p>
+            <a:endParaRPr/>
+          </a:p>
         </p:txBody>
       </p:sp>
       <p:sp>
@@ -3682,7 +3687,7 @@
           <a:noFill/>
         </p:spPr>
         <p:txBody>
-          <a:bodyPr wrap="square" lIns="0" rIns="0" tIns="0" bIns="0" anchor="t">
+          <a:bodyPr wrap="square" lIns="0" tIns="0" rIns="0" bIns="0" anchor="t">
             <a:spAutoFit/>
           </a:bodyPr>
           <a:lstStyle/>
@@ -3717,7 +3722,7 @@
           <a:noFill/>
         </p:spPr>
         <p:txBody>
-          <a:bodyPr wrap="square" lIns="0" rIns="0" tIns="0" bIns="0" anchor="t">
+          <a:bodyPr wrap="square" lIns="0" tIns="0" rIns="0" bIns="0" anchor="t">
             <a:spAutoFit/>
           </a:bodyPr>
           <a:lstStyle/>
@@ -3774,7 +3779,9 @@
         <p:txBody>
           <a:bodyPr rtlCol="0" anchor="ctr"/>
           <a:lstStyle/>
-          <a:p/>
+          <a:p>
+            <a:endParaRPr/>
+          </a:p>
         </p:txBody>
       </p:sp>
       <p:sp>
@@ -3794,7 +3801,7 @@
           <a:noFill/>
         </p:spPr>
         <p:txBody>
-          <a:bodyPr wrap="square" lIns="0" rIns="0" tIns="0" bIns="0" anchor="t">
+          <a:bodyPr wrap="square" lIns="0" tIns="0" rIns="0" bIns="0" anchor="t">
             <a:spAutoFit/>
           </a:bodyPr>
           <a:lstStyle/>
@@ -3829,7 +3836,7 @@
           <a:noFill/>
         </p:spPr>
         <p:txBody>
-          <a:bodyPr wrap="square" lIns="0" rIns="0" tIns="0" bIns="0" anchor="t">
+          <a:bodyPr wrap="square" lIns="0" tIns="0" rIns="0" bIns="0" anchor="t">
             <a:spAutoFit/>
           </a:bodyPr>
           <a:lstStyle/>
@@ -3886,7 +3893,9 @@
         <p:txBody>
           <a:bodyPr rtlCol="0" anchor="ctr"/>
           <a:lstStyle/>
-          <a:p/>
+          <a:p>
+            <a:endParaRPr/>
+          </a:p>
         </p:txBody>
       </p:sp>
       <p:sp>
@@ -3906,7 +3915,7 @@
           <a:noFill/>
         </p:spPr>
         <p:txBody>
-          <a:bodyPr wrap="square" lIns="0" rIns="0" tIns="0" bIns="0" anchor="t">
+          <a:bodyPr wrap="square" lIns="0" tIns="0" rIns="0" bIns="0" anchor="t">
             <a:spAutoFit/>
           </a:bodyPr>
           <a:lstStyle/>
@@ -3941,7 +3950,7 @@
           <a:noFill/>
         </p:spPr>
         <p:txBody>
-          <a:bodyPr wrap="square" lIns="0" rIns="0" tIns="0" bIns="0" anchor="t">
+          <a:bodyPr wrap="square" lIns="0" tIns="0" rIns="0" bIns="0" anchor="t">
             <a:spAutoFit/>
           </a:bodyPr>
           <a:lstStyle/>
@@ -3998,7 +4007,9 @@
         <p:txBody>
           <a:bodyPr rtlCol="0" anchor="ctr"/>
           <a:lstStyle/>
-          <a:p/>
+          <a:p>
+            <a:endParaRPr/>
+          </a:p>
         </p:txBody>
       </p:sp>
       <p:sp>
@@ -4018,7 +4029,7 @@
           <a:noFill/>
         </p:spPr>
         <p:txBody>
-          <a:bodyPr wrap="square" lIns="0" rIns="0" tIns="0" bIns="0" anchor="t">
+          <a:bodyPr wrap="square" lIns="0" tIns="0" rIns="0" bIns="0" anchor="t">
             <a:spAutoFit/>
           </a:bodyPr>
           <a:lstStyle/>
@@ -4053,7 +4064,7 @@
           <a:noFill/>
         </p:spPr>
         <p:txBody>
-          <a:bodyPr wrap="square" lIns="0" rIns="0" tIns="0" bIns="0" anchor="t">
+          <a:bodyPr wrap="square" lIns="0" tIns="0" rIns="0" bIns="0" anchor="t">
             <a:spAutoFit/>
           </a:bodyPr>
           <a:lstStyle/>
@@ -4110,7 +4121,9 @@
         <p:txBody>
           <a:bodyPr rtlCol="0" anchor="ctr"/>
           <a:lstStyle/>
-          <a:p/>
+          <a:p>
+            <a:endParaRPr/>
+          </a:p>
         </p:txBody>
       </p:sp>
       <p:sp>
@@ -4130,7 +4143,7 @@
           <a:noFill/>
         </p:spPr>
         <p:txBody>
-          <a:bodyPr wrap="square" lIns="0" rIns="0" tIns="0" bIns="0" anchor="t">
+          <a:bodyPr wrap="square" lIns="0" tIns="0" rIns="0" bIns="0" anchor="t">
             <a:spAutoFit/>
           </a:bodyPr>
           <a:lstStyle/>
@@ -4165,7 +4178,7 @@
           <a:noFill/>
         </p:spPr>
         <p:txBody>
-          <a:bodyPr wrap="square" lIns="0" rIns="0" tIns="0" bIns="0" anchor="t">
+          <a:bodyPr wrap="square" lIns="0" tIns="0" rIns="0" bIns="0" anchor="t">
             <a:spAutoFit/>
           </a:bodyPr>
           <a:lstStyle/>
@@ -4222,7 +4235,9 @@
         <p:txBody>
           <a:bodyPr rtlCol="0" anchor="ctr"/>
           <a:lstStyle/>
-          <a:p/>
+          <a:p>
+            <a:endParaRPr/>
+          </a:p>
         </p:txBody>
       </p:sp>
       <p:sp>
@@ -4242,7 +4257,7 @@
           <a:noFill/>
         </p:spPr>
         <p:txBody>
-          <a:bodyPr wrap="square" lIns="0" rIns="0" tIns="0" bIns="0" anchor="ctr">
+          <a:bodyPr wrap="square" lIns="0" tIns="0" rIns="0" bIns="0" anchor="ctr">
             <a:spAutoFit/>
           </a:bodyPr>
           <a:lstStyle/>
@@ -4269,7 +4284,7 @@
 </file>
 
 <file path=ppt/slides/slide2.xml><?xml version="1.0" encoding="utf-8"?>
-<p:sld xmlns:a="http://schemas.openxmlformats.org/drawingml/2006/main" xmlns:p="http://schemas.openxmlformats.org/presentationml/2006/main" xmlns:r="http://schemas.openxmlformats.org/officeDocument/2006/relationships">
+<p:sld xmlns:a="http://schemas.openxmlformats.org/drawingml/2006/main" xmlns:r="http://schemas.openxmlformats.org/officeDocument/2006/relationships" xmlns:p="http://schemas.openxmlformats.org/presentationml/2006/main">
   <p:cSld>
     <p:spTree>
       <p:nvGrpSpPr>
@@ -4277,7 +4292,14 @@
         <p:cNvGrpSpPr/>
         <p:nvPr/>
       </p:nvGrpSpPr>
-      <p:grpSpPr/>
+      <p:grpSpPr>
+        <a:xfrm>
+          <a:off x="0" y="0"/>
+          <a:ext cx="0" cy="0"/>
+          <a:chOff x="0" y="0"/>
+          <a:chExt cx="0" cy="0"/>
+        </a:xfrm>
+      </p:grpSpPr>
       <p:sp>
         <p:nvSpPr>
           <p:cNvPr id="2" name="TextBox 1"/>
@@ -4295,7 +4317,7 @@
           <a:noFill/>
         </p:spPr>
         <p:txBody>
-          <a:bodyPr wrap="square" lIns="0" rIns="0" tIns="0" bIns="0" anchor="t">
+          <a:bodyPr wrap="square" lIns="0" tIns="0" rIns="0" bIns="0" anchor="t">
             <a:spAutoFit/>
           </a:bodyPr>
           <a:lstStyle/>
@@ -4330,7 +4352,7 @@
           <a:noFill/>
         </p:spPr>
         <p:txBody>
-          <a:bodyPr wrap="square" lIns="0" rIns="0" tIns="0" bIns="0" anchor="t">
+          <a:bodyPr wrap="square" lIns="0" tIns="0" rIns="0" bIns="0" anchor="t">
             <a:spAutoFit/>
           </a:bodyPr>
           <a:lstStyle/>
@@ -4387,7 +4409,9 @@
         <p:txBody>
           <a:bodyPr rtlCol="0" anchor="ctr"/>
           <a:lstStyle/>
-          <a:p/>
+          <a:p>
+            <a:endParaRPr/>
+          </a:p>
         </p:txBody>
       </p:sp>
       <p:sp>
@@ -4429,7 +4453,9 @@
         <p:txBody>
           <a:bodyPr rtlCol="0" anchor="ctr"/>
           <a:lstStyle/>
-          <a:p/>
+          <a:p>
+            <a:endParaRPr/>
+          </a:p>
         </p:txBody>
       </p:sp>
       <p:sp>
@@ -4449,7 +4475,7 @@
           <a:noFill/>
         </p:spPr>
         <p:txBody>
-          <a:bodyPr wrap="square" lIns="0" rIns="0" tIns="0" bIns="0" anchor="t">
+          <a:bodyPr wrap="square" lIns="0" tIns="0" rIns="0" bIns="0" anchor="t">
             <a:spAutoFit/>
           </a:bodyPr>
           <a:lstStyle/>
@@ -4484,7 +4510,7 @@
           <a:noFill/>
         </p:spPr>
         <p:txBody>
-          <a:bodyPr wrap="square" lIns="0" rIns="0" tIns="0" bIns="0" anchor="t">
+          <a:bodyPr wrap="square" lIns="0" tIns="0" rIns="0" bIns="0" anchor="t">
             <a:spAutoFit/>
           </a:bodyPr>
           <a:lstStyle/>
@@ -4541,7 +4567,9 @@
         <p:txBody>
           <a:bodyPr rtlCol="0" anchor="ctr"/>
           <a:lstStyle/>
-          <a:p/>
+          <a:p>
+            <a:endParaRPr/>
+          </a:p>
         </p:txBody>
       </p:sp>
       <p:sp>
@@ -4561,7 +4589,7 @@
           <a:noFill/>
         </p:spPr>
         <p:txBody>
-          <a:bodyPr wrap="square" lIns="0" rIns="0" tIns="0" bIns="0" anchor="t">
+          <a:bodyPr wrap="square" lIns="0" tIns="0" rIns="0" bIns="0" anchor="t">
             <a:spAutoFit/>
           </a:bodyPr>
           <a:lstStyle/>
@@ -4596,7 +4624,7 @@
           <a:noFill/>
         </p:spPr>
         <p:txBody>
-          <a:bodyPr wrap="square" lIns="0" rIns="0" tIns="0" bIns="0" anchor="t">
+          <a:bodyPr wrap="square" lIns="0" tIns="0" rIns="0" bIns="0" anchor="t">
             <a:spAutoFit/>
           </a:bodyPr>
           <a:lstStyle/>
@@ -4631,7 +4659,7 @@
           <a:noFill/>
         </p:spPr>
         <p:txBody>
-          <a:bodyPr wrap="square" lIns="0" rIns="0" tIns="0" bIns="0" anchor="t">
+          <a:bodyPr wrap="square" lIns="0" tIns="0" rIns="0" bIns="0" anchor="t">
             <a:spAutoFit/>
           </a:bodyPr>
           <a:lstStyle/>
@@ -4693,7 +4721,9 @@
         <p:txBody>
           <a:bodyPr rtlCol="0" anchor="ctr"/>
           <a:lstStyle/>
-          <a:p/>
+          <a:p>
+            <a:endParaRPr/>
+          </a:p>
         </p:txBody>
       </p:sp>
       <p:sp>
@@ -4713,7 +4743,7 @@
           <a:noFill/>
         </p:spPr>
         <p:txBody>
-          <a:bodyPr wrap="square" lIns="0" rIns="0" tIns="0" bIns="0" anchor="t">
+          <a:bodyPr wrap="square" lIns="0" tIns="0" rIns="0" bIns="0" anchor="t">
             <a:spAutoFit/>
           </a:bodyPr>
           <a:lstStyle/>
@@ -4748,7 +4778,7 @@
           <a:noFill/>
         </p:spPr>
         <p:txBody>
-          <a:bodyPr wrap="square" lIns="0" rIns="0" tIns="0" bIns="0" anchor="t">
+          <a:bodyPr wrap="square" lIns="0" tIns="0" rIns="0" bIns="0" anchor="t">
             <a:spAutoFit/>
           </a:bodyPr>
           <a:lstStyle/>
@@ -4783,7 +4813,7 @@
           <a:noFill/>
         </p:spPr>
         <p:txBody>
-          <a:bodyPr wrap="square" lIns="0" rIns="0" tIns="0" bIns="0" anchor="t">
+          <a:bodyPr wrap="square" lIns="0" tIns="0" rIns="0" bIns="0" anchor="t">
             <a:spAutoFit/>
           </a:bodyPr>
           <a:lstStyle/>
@@ -4845,7 +4875,9 @@
         <p:txBody>
           <a:bodyPr rtlCol="0" anchor="ctr"/>
           <a:lstStyle/>
-          <a:p/>
+          <a:p>
+            <a:endParaRPr/>
+          </a:p>
         </p:txBody>
       </p:sp>
       <p:sp>
@@ -4865,7 +4897,7 @@
           <a:noFill/>
         </p:spPr>
         <p:txBody>
-          <a:bodyPr wrap="square" lIns="0" rIns="0" tIns="0" bIns="0" anchor="t">
+          <a:bodyPr wrap="square" lIns="0" tIns="0" rIns="0" bIns="0" anchor="t">
             <a:spAutoFit/>
           </a:bodyPr>
           <a:lstStyle/>
@@ -4900,7 +4932,7 @@
           <a:noFill/>
         </p:spPr>
         <p:txBody>
-          <a:bodyPr wrap="square" lIns="0" rIns="0" tIns="0" bIns="0" anchor="t">
+          <a:bodyPr wrap="square" lIns="0" tIns="0" rIns="0" bIns="0" anchor="t">
             <a:spAutoFit/>
           </a:bodyPr>
           <a:lstStyle/>
@@ -4935,7 +4967,7 @@
           <a:noFill/>
         </p:spPr>
         <p:txBody>
-          <a:bodyPr wrap="square" lIns="0" rIns="0" tIns="0" bIns="0" anchor="t">
+          <a:bodyPr wrap="square" lIns="0" tIns="0" rIns="0" bIns="0" anchor="t">
             <a:spAutoFit/>
           </a:bodyPr>
           <a:lstStyle/>
@@ -4997,7 +5029,9 @@
         <p:txBody>
           <a:bodyPr rtlCol="0" anchor="ctr"/>
           <a:lstStyle/>
-          <a:p/>
+          <a:p>
+            <a:endParaRPr/>
+          </a:p>
         </p:txBody>
       </p:sp>
       <p:sp>
@@ -5039,7 +5073,9 @@
         <p:txBody>
           <a:bodyPr rtlCol="0" anchor="ctr"/>
           <a:lstStyle/>
-          <a:p/>
+          <a:p>
+            <a:endParaRPr/>
+          </a:p>
         </p:txBody>
       </p:sp>
       <p:sp>
@@ -5059,7 +5095,7 @@
           <a:noFill/>
         </p:spPr>
         <p:txBody>
-          <a:bodyPr wrap="square" lIns="0" rIns="0" tIns="0" bIns="0" anchor="ctr">
+          <a:bodyPr wrap="square" lIns="0" tIns="0" rIns="0" bIns="0" anchor="ctr">
             <a:spAutoFit/>
           </a:bodyPr>
           <a:lstStyle/>
@@ -5095,7 +5131,7 @@
 </file>
 
 <file path=ppt/slides/slide3.xml><?xml version="1.0" encoding="utf-8"?>
-<p:sld xmlns:a="http://schemas.openxmlformats.org/drawingml/2006/main" xmlns:p="http://schemas.openxmlformats.org/presentationml/2006/main" xmlns:r="http://schemas.openxmlformats.org/officeDocument/2006/relationships">
+<p:sld xmlns:a="http://schemas.openxmlformats.org/drawingml/2006/main" xmlns:r="http://schemas.openxmlformats.org/officeDocument/2006/relationships" xmlns:p="http://schemas.openxmlformats.org/presentationml/2006/main">
   <p:cSld>
     <p:spTree>
       <p:nvGrpSpPr>
@@ -5103,7 +5139,14 @@
         <p:cNvGrpSpPr/>
         <p:nvPr/>
       </p:nvGrpSpPr>
-      <p:grpSpPr/>
+      <p:grpSpPr>
+        <a:xfrm>
+          <a:off x="0" y="0"/>
+          <a:ext cx="0" cy="0"/>
+          <a:chOff x="0" y="0"/>
+          <a:chExt cx="0" cy="0"/>
+        </a:xfrm>
+      </p:grpSpPr>
       <p:sp>
         <p:nvSpPr>
           <p:cNvPr id="2" name="TextBox 1"/>
@@ -5121,7 +5164,7 @@
           <a:noFill/>
         </p:spPr>
         <p:txBody>
-          <a:bodyPr wrap="square" lIns="0" rIns="0" tIns="0" bIns="0" anchor="t">
+          <a:bodyPr wrap="square" lIns="0" tIns="0" rIns="0" bIns="0" anchor="t">
             <a:spAutoFit/>
           </a:bodyPr>
           <a:lstStyle/>
@@ -5156,7 +5199,7 @@
           <a:noFill/>
         </p:spPr>
         <p:txBody>
-          <a:bodyPr wrap="square" lIns="0" rIns="0" tIns="0" bIns="0" anchor="t">
+          <a:bodyPr wrap="square" lIns="0" tIns="0" rIns="0" bIns="0" anchor="t">
             <a:spAutoFit/>
           </a:bodyPr>
           <a:lstStyle/>
@@ -5213,7 +5256,9 @@
         <p:txBody>
           <a:bodyPr rtlCol="0" anchor="ctr"/>
           <a:lstStyle/>
-          <a:p/>
+          <a:p>
+            <a:endParaRPr/>
+          </a:p>
         </p:txBody>
       </p:sp>
       <p:sp>
@@ -5255,7 +5300,9 @@
         <p:txBody>
           <a:bodyPr rtlCol="0" anchor="ctr"/>
           <a:lstStyle/>
-          <a:p/>
+          <a:p>
+            <a:endParaRPr/>
+          </a:p>
         </p:txBody>
       </p:sp>
       <p:sp>
@@ -5275,7 +5322,7 @@
           <a:noFill/>
         </p:spPr>
         <p:txBody>
-          <a:bodyPr wrap="square" lIns="0" rIns="0" tIns="0" bIns="0" anchor="t">
+          <a:bodyPr wrap="square" lIns="0" tIns="0" rIns="0" bIns="0" anchor="t">
             <a:spAutoFit/>
           </a:bodyPr>
           <a:lstStyle/>
@@ -5310,7 +5357,7 @@
           <a:noFill/>
         </p:spPr>
         <p:txBody>
-          <a:bodyPr wrap="square" lIns="0" rIns="0" tIns="0" bIns="0" anchor="t">
+          <a:bodyPr wrap="square" lIns="0" tIns="0" rIns="0" bIns="0" anchor="t">
             <a:spAutoFit/>
           </a:bodyPr>
           <a:lstStyle/>
@@ -5463,7 +5510,9 @@
         <p:txBody>
           <a:bodyPr rtlCol="0" anchor="ctr"/>
           <a:lstStyle/>
-          <a:p/>
+          <a:p>
+            <a:endParaRPr/>
+          </a:p>
         </p:txBody>
       </p:sp>
       <p:sp>
@@ -5483,7 +5532,7 @@
           <a:noFill/>
         </p:spPr>
         <p:txBody>
-          <a:bodyPr wrap="square" lIns="0" rIns="0" tIns="0" bIns="0" anchor="t">
+          <a:bodyPr wrap="square" lIns="0" tIns="0" rIns="0" bIns="0" anchor="t">
             <a:spAutoFit/>
           </a:bodyPr>
           <a:lstStyle/>
@@ -5518,7 +5567,7 @@
           <a:noFill/>
         </p:spPr>
         <p:txBody>
-          <a:bodyPr wrap="square" lIns="0" rIns="0" tIns="0" bIns="0" anchor="t">
+          <a:bodyPr wrap="square" lIns="0" tIns="0" rIns="0" bIns="0" anchor="t">
             <a:spAutoFit/>
           </a:bodyPr>
           <a:lstStyle/>
@@ -5553,7 +5602,7 @@
           <a:noFill/>
         </p:spPr>
         <p:txBody>
-          <a:bodyPr wrap="square" lIns="0" rIns="0" tIns="0" bIns="0" anchor="t">
+          <a:bodyPr wrap="square" lIns="0" tIns="0" rIns="0" bIns="0" anchor="t">
             <a:spAutoFit/>
           </a:bodyPr>
           <a:lstStyle/>
@@ -5588,7 +5637,7 @@
           <a:noFill/>
         </p:spPr>
         <p:txBody>
-          <a:bodyPr wrap="square" lIns="0" rIns="0" tIns="0" bIns="0" anchor="t">
+          <a:bodyPr wrap="square" lIns="0" tIns="0" rIns="0" bIns="0" anchor="t">
             <a:spAutoFit/>
           </a:bodyPr>
           <a:lstStyle/>
@@ -5645,7 +5694,9 @@
         <p:txBody>
           <a:bodyPr rtlCol="0" anchor="ctr"/>
           <a:lstStyle/>
-          <a:p/>
+          <a:p>
+            <a:endParaRPr/>
+          </a:p>
         </p:txBody>
       </p:sp>
       <p:sp>
@@ -5687,7 +5738,9 @@
         <p:txBody>
           <a:bodyPr rtlCol="0" anchor="ctr"/>
           <a:lstStyle/>
-          <a:p/>
+          <a:p>
+            <a:endParaRPr/>
+          </a:p>
         </p:txBody>
       </p:sp>
       <p:sp>
@@ -5707,7 +5760,7 @@
           <a:noFill/>
         </p:spPr>
         <p:txBody>
-          <a:bodyPr wrap="square" lIns="0" rIns="0" tIns="0" bIns="0" anchor="t">
+          <a:bodyPr wrap="square" lIns="0" tIns="0" rIns="0" bIns="0" anchor="t">
             <a:spAutoFit/>
           </a:bodyPr>
           <a:lstStyle/>
@@ -5742,7 +5795,7 @@
           <a:noFill/>
         </p:spPr>
         <p:txBody>
-          <a:bodyPr wrap="square" lIns="0" rIns="0" tIns="0" bIns="0" anchor="t">
+          <a:bodyPr wrap="square" lIns="0" tIns="0" rIns="0" bIns="0" anchor="t">
             <a:spAutoFit/>
           </a:bodyPr>
           <a:lstStyle/>
@@ -5799,7 +5852,9 @@
         <p:txBody>
           <a:bodyPr rtlCol="0" anchor="ctr"/>
           <a:lstStyle/>
-          <a:p/>
+          <a:p>
+            <a:endParaRPr/>
+          </a:p>
         </p:txBody>
       </p:sp>
       <p:sp>
@@ -5841,7 +5896,9 @@
         <p:txBody>
           <a:bodyPr rtlCol="0" anchor="ctr"/>
           <a:lstStyle/>
-          <a:p/>
+          <a:p>
+            <a:endParaRPr/>
+          </a:p>
         </p:txBody>
       </p:sp>
       <p:sp>
@@ -5861,7 +5918,7 @@
           <a:noFill/>
         </p:spPr>
         <p:txBody>
-          <a:bodyPr wrap="square" lIns="0" rIns="0" tIns="0" bIns="0" anchor="t">
+          <a:bodyPr wrap="square" lIns="0" tIns="0" rIns="0" bIns="0" anchor="t">
             <a:spAutoFit/>
           </a:bodyPr>
           <a:lstStyle/>
@@ -5896,7 +5953,7 @@
           <a:noFill/>
         </p:spPr>
         <p:txBody>
-          <a:bodyPr wrap="square" lIns="0" rIns="0" tIns="0" bIns="0" anchor="t">
+          <a:bodyPr wrap="square" lIns="0" tIns="0" rIns="0" bIns="0" anchor="t">
             <a:spAutoFit/>
           </a:bodyPr>
           <a:lstStyle/>
@@ -5953,7 +6010,9 @@
         <p:txBody>
           <a:bodyPr rtlCol="0" anchor="ctr"/>
           <a:lstStyle/>
-          <a:p/>
+          <a:p>
+            <a:endParaRPr/>
+          </a:p>
         </p:txBody>
       </p:sp>
       <p:sp>
@@ -5995,7 +6054,9 @@
         <p:txBody>
           <a:bodyPr rtlCol="0" anchor="ctr"/>
           <a:lstStyle/>
-          <a:p/>
+          <a:p>
+            <a:endParaRPr/>
+          </a:p>
         </p:txBody>
       </p:sp>
     </p:spTree>
@@ -6007,7 +6068,7 @@
 </file>
 
 <file path=ppt/slides/slide4.xml><?xml version="1.0" encoding="utf-8"?>
-<p:sld xmlns:a="http://schemas.openxmlformats.org/drawingml/2006/main" xmlns:p="http://schemas.openxmlformats.org/presentationml/2006/main" xmlns:r="http://schemas.openxmlformats.org/officeDocument/2006/relationships">
+<p:sld xmlns:a="http://schemas.openxmlformats.org/drawingml/2006/main" xmlns:r="http://schemas.openxmlformats.org/officeDocument/2006/relationships" xmlns:p="http://schemas.openxmlformats.org/presentationml/2006/main">
   <p:cSld>
     <p:spTree>
       <p:nvGrpSpPr>
@@ -6015,7 +6076,14 @@
         <p:cNvGrpSpPr/>
         <p:nvPr/>
       </p:nvGrpSpPr>
-      <p:grpSpPr/>
+      <p:grpSpPr>
+        <a:xfrm>
+          <a:off x="0" y="0"/>
+          <a:ext cx="0" cy="0"/>
+          <a:chOff x="0" y="0"/>
+          <a:chExt cx="0" cy="0"/>
+        </a:xfrm>
+      </p:grpSpPr>
       <p:sp>
         <p:nvSpPr>
           <p:cNvPr id="2" name="TextBox 1"/>
@@ -6033,7 +6101,7 @@
           <a:noFill/>
         </p:spPr>
         <p:txBody>
-          <a:bodyPr wrap="square" lIns="0" rIns="0" tIns="0" bIns="0" anchor="t">
+          <a:bodyPr wrap="square" lIns="0" tIns="0" rIns="0" bIns="0" anchor="t">
             <a:spAutoFit/>
           </a:bodyPr>
           <a:lstStyle/>
@@ -6068,7 +6136,7 @@
           <a:noFill/>
         </p:spPr>
         <p:txBody>
-          <a:bodyPr wrap="square" lIns="0" rIns="0" tIns="0" bIns="0" anchor="t">
+          <a:bodyPr wrap="square" lIns="0" tIns="0" rIns="0" bIns="0" anchor="t">
             <a:spAutoFit/>
           </a:bodyPr>
           <a:lstStyle/>
@@ -6125,7 +6193,9 @@
         <p:txBody>
           <a:bodyPr rtlCol="0" anchor="ctr"/>
           <a:lstStyle/>
-          <a:p/>
+          <a:p>
+            <a:endParaRPr/>
+          </a:p>
         </p:txBody>
       </p:sp>
       <p:sp>
@@ -6167,7 +6237,9 @@
         <p:txBody>
           <a:bodyPr rtlCol="0" anchor="ctr"/>
           <a:lstStyle/>
-          <a:p/>
+          <a:p>
+            <a:endParaRPr/>
+          </a:p>
         </p:txBody>
       </p:sp>
       <p:sp>
@@ -6187,7 +6259,7 @@
           <a:noFill/>
         </p:spPr>
         <p:txBody>
-          <a:bodyPr wrap="square" lIns="0" rIns="0" tIns="0" bIns="0" anchor="t">
+          <a:bodyPr wrap="square" lIns="0" tIns="0" rIns="0" bIns="0" anchor="t">
             <a:spAutoFit/>
           </a:bodyPr>
           <a:lstStyle/>
@@ -6222,7 +6294,7 @@
           <a:noFill/>
         </p:spPr>
         <p:txBody>
-          <a:bodyPr wrap="square" lIns="0" rIns="0" tIns="0" bIns="0" anchor="t">
+          <a:bodyPr wrap="square" lIns="0" tIns="0" rIns="0" bIns="0" anchor="t">
             <a:spAutoFit/>
           </a:bodyPr>
           <a:lstStyle/>
@@ -6279,7 +6351,9 @@
         <p:txBody>
           <a:bodyPr rtlCol="0" anchor="ctr"/>
           <a:lstStyle/>
-          <a:p/>
+          <a:p>
+            <a:endParaRPr/>
+          </a:p>
         </p:txBody>
       </p:sp>
       <p:sp>
@@ -6299,7 +6373,7 @@
           <a:noFill/>
         </p:spPr>
         <p:txBody>
-          <a:bodyPr wrap="square" lIns="0" rIns="0" tIns="0" bIns="0" anchor="t">
+          <a:bodyPr wrap="square" lIns="0" tIns="0" rIns="0" bIns="0" anchor="t">
             <a:spAutoFit/>
           </a:bodyPr>
           <a:lstStyle/>
@@ -6334,7 +6408,7 @@
           <a:noFill/>
         </p:spPr>
         <p:txBody>
-          <a:bodyPr wrap="square" lIns="0" rIns="0" tIns="0" bIns="0" anchor="t">
+          <a:bodyPr wrap="square" lIns="0" tIns="0" rIns="0" bIns="0" anchor="t">
             <a:spAutoFit/>
           </a:bodyPr>
           <a:lstStyle/>
@@ -6391,7 +6465,9 @@
         <p:txBody>
           <a:bodyPr rtlCol="0" anchor="ctr"/>
           <a:lstStyle/>
-          <a:p/>
+          <a:p>
+            <a:endParaRPr/>
+          </a:p>
         </p:txBody>
       </p:sp>
       <p:sp>
@@ -6411,7 +6487,7 @@
           <a:noFill/>
         </p:spPr>
         <p:txBody>
-          <a:bodyPr wrap="square" lIns="0" rIns="0" tIns="0" bIns="0" anchor="t">
+          <a:bodyPr wrap="square" lIns="0" tIns="0" rIns="0" bIns="0" anchor="t">
             <a:spAutoFit/>
           </a:bodyPr>
           <a:lstStyle/>
@@ -6446,7 +6522,7 @@
           <a:noFill/>
         </p:spPr>
         <p:txBody>
-          <a:bodyPr wrap="square" lIns="0" rIns="0" tIns="0" bIns="0" anchor="t">
+          <a:bodyPr wrap="square" lIns="0" tIns="0" rIns="0" bIns="0" anchor="t">
             <a:spAutoFit/>
           </a:bodyPr>
           <a:lstStyle/>
@@ -6503,7 +6579,9 @@
         <p:txBody>
           <a:bodyPr rtlCol="0" anchor="ctr"/>
           <a:lstStyle/>
-          <a:p/>
+          <a:p>
+            <a:endParaRPr/>
+          </a:p>
         </p:txBody>
       </p:sp>
       <p:sp>
@@ -6523,7 +6601,7 @@
           <a:noFill/>
         </p:spPr>
         <p:txBody>
-          <a:bodyPr wrap="square" lIns="0" rIns="0" tIns="0" bIns="0" anchor="t">
+          <a:bodyPr wrap="square" lIns="0" tIns="0" rIns="0" bIns="0" anchor="t">
             <a:spAutoFit/>
           </a:bodyPr>
           <a:lstStyle/>
@@ -6558,7 +6636,7 @@
           <a:noFill/>
         </p:spPr>
         <p:txBody>
-          <a:bodyPr wrap="square" lIns="0" rIns="0" tIns="0" bIns="0" anchor="t">
+          <a:bodyPr wrap="square" lIns="0" tIns="0" rIns="0" bIns="0" anchor="t">
             <a:spAutoFit/>
           </a:bodyPr>
           <a:lstStyle/>
@@ -6615,7 +6693,9 @@
         <p:txBody>
           <a:bodyPr rtlCol="0" anchor="ctr"/>
           <a:lstStyle/>
-          <a:p/>
+          <a:p>
+            <a:endParaRPr/>
+          </a:p>
         </p:txBody>
       </p:sp>
       <p:sp>
@@ -6635,7 +6715,7 @@
           <a:noFill/>
         </p:spPr>
         <p:txBody>
-          <a:bodyPr wrap="square" lIns="0" rIns="0" tIns="0" bIns="0" anchor="t">
+          <a:bodyPr wrap="square" lIns="0" tIns="0" rIns="0" bIns="0" anchor="t">
             <a:spAutoFit/>
           </a:bodyPr>
           <a:lstStyle/>
@@ -6670,7 +6750,7 @@
           <a:noFill/>
         </p:spPr>
         <p:txBody>
-          <a:bodyPr wrap="square" lIns="0" rIns="0" tIns="0" bIns="0" anchor="t">
+          <a:bodyPr wrap="square" lIns="0" tIns="0" rIns="0" bIns="0" anchor="t">
             <a:spAutoFit/>
           </a:bodyPr>
           <a:lstStyle/>
@@ -6727,7 +6807,9 @@
         <p:txBody>
           <a:bodyPr rtlCol="0" anchor="ctr"/>
           <a:lstStyle/>
-          <a:p/>
+          <a:p>
+            <a:endParaRPr/>
+          </a:p>
         </p:txBody>
       </p:sp>
       <p:sp>
@@ -6747,7 +6829,7 @@
           <a:noFill/>
         </p:spPr>
         <p:txBody>
-          <a:bodyPr wrap="square" lIns="0" rIns="0" tIns="0" bIns="0" anchor="t">
+          <a:bodyPr wrap="square" lIns="0" tIns="0" rIns="0" bIns="0" anchor="t">
             <a:spAutoFit/>
           </a:bodyPr>
           <a:lstStyle/>
@@ -6782,7 +6864,7 @@
           <a:noFill/>
         </p:spPr>
         <p:txBody>
-          <a:bodyPr wrap="square" lIns="0" rIns="0" tIns="0" bIns="0" anchor="t">
+          <a:bodyPr wrap="square" lIns="0" tIns="0" rIns="0" bIns="0" anchor="t">
             <a:spAutoFit/>
           </a:bodyPr>
           <a:lstStyle/>
@@ -6822,7 +6904,7 @@
           <a:noFill/>
         </p:spPr>
         <p:txBody>
-          <a:bodyPr wrap="square" lIns="0" rIns="0" tIns="0" bIns="0" anchor="t">
+          <a:bodyPr wrap="square" lIns="0" tIns="0" rIns="0" bIns="0" anchor="t">
             <a:spAutoFit/>
           </a:bodyPr>
           <a:lstStyle/>
@@ -6879,7 +6961,9 @@
         <p:txBody>
           <a:bodyPr rtlCol="0" anchor="ctr"/>
           <a:lstStyle/>
-          <a:p/>
+          <a:p>
+            <a:endParaRPr/>
+          </a:p>
         </p:txBody>
       </p:sp>
       <p:sp>
@@ -6921,7 +7005,9 @@
         <p:txBody>
           <a:bodyPr rtlCol="0" anchor="ctr"/>
           <a:lstStyle/>
-          <a:p/>
+          <a:p>
+            <a:endParaRPr/>
+          </a:p>
         </p:txBody>
       </p:sp>
       <p:sp>
@@ -6941,7 +7027,7 @@
           <a:noFill/>
         </p:spPr>
         <p:txBody>
-          <a:bodyPr wrap="square" lIns="0" rIns="0" tIns="0" bIns="0" anchor="t">
+          <a:bodyPr wrap="square" lIns="0" tIns="0" rIns="0" bIns="0" anchor="t">
             <a:spAutoFit/>
           </a:bodyPr>
           <a:lstStyle/>
@@ -6976,7 +7062,7 @@
           <a:noFill/>
         </p:spPr>
         <p:txBody>
-          <a:bodyPr wrap="square" lIns="0" rIns="0" tIns="0" bIns="0" anchor="t">
+          <a:bodyPr wrap="square" lIns="0" tIns="0" rIns="0" bIns="0" anchor="t">
             <a:spAutoFit/>
           </a:bodyPr>
           <a:lstStyle/>
@@ -7033,7 +7119,9 @@
         <p:txBody>
           <a:bodyPr rtlCol="0" anchor="ctr"/>
           <a:lstStyle/>
-          <a:p/>
+          <a:p>
+            <a:endParaRPr/>
+          </a:p>
         </p:txBody>
       </p:sp>
       <p:sp>
@@ -7075,7 +7163,9 @@
         <p:txBody>
           <a:bodyPr rtlCol="0" anchor="ctr"/>
           <a:lstStyle/>
-          <a:p/>
+          <a:p>
+            <a:endParaRPr/>
+          </a:p>
         </p:txBody>
       </p:sp>
       <p:sp>
@@ -7095,7 +7185,7 @@
           <a:noFill/>
         </p:spPr>
         <p:txBody>
-          <a:bodyPr wrap="square" lIns="0" rIns="0" tIns="0" bIns="0" anchor="ctr">
+          <a:bodyPr wrap="square" lIns="0" tIns="0" rIns="0" bIns="0" anchor="ctr">
             <a:spAutoFit/>
           </a:bodyPr>
           <a:lstStyle/>
@@ -7131,7 +7221,7 @@
 </file>
 
 <file path=ppt/slides/slide5.xml><?xml version="1.0" encoding="utf-8"?>
-<p:sld xmlns:a="http://schemas.openxmlformats.org/drawingml/2006/main" xmlns:p="http://schemas.openxmlformats.org/presentationml/2006/main" xmlns:r="http://schemas.openxmlformats.org/officeDocument/2006/relationships">
+<p:sld xmlns:a="http://schemas.openxmlformats.org/drawingml/2006/main" xmlns:r="http://schemas.openxmlformats.org/officeDocument/2006/relationships" xmlns:p="http://schemas.openxmlformats.org/presentationml/2006/main">
   <p:cSld>
     <p:spTree>
       <p:nvGrpSpPr>
@@ -7139,7 +7229,14 @@
         <p:cNvGrpSpPr/>
         <p:nvPr/>
       </p:nvGrpSpPr>
-      <p:grpSpPr/>
+      <p:grpSpPr>
+        <a:xfrm>
+          <a:off x="0" y="0"/>
+          <a:ext cx="0" cy="0"/>
+          <a:chOff x="0" y="0"/>
+          <a:chExt cx="0" cy="0"/>
+        </a:xfrm>
+      </p:grpSpPr>
       <p:sp>
         <p:nvSpPr>
           <p:cNvPr id="2" name="TextBox 1"/>
@@ -7157,7 +7254,7 @@
           <a:noFill/>
         </p:spPr>
         <p:txBody>
-          <a:bodyPr wrap="square" lIns="0" rIns="0" tIns="0" bIns="0" anchor="t">
+          <a:bodyPr wrap="square" lIns="0" tIns="0" rIns="0" bIns="0" anchor="t">
             <a:spAutoFit/>
           </a:bodyPr>
           <a:lstStyle/>
@@ -7192,7 +7289,7 @@
           <a:noFill/>
         </p:spPr>
         <p:txBody>
-          <a:bodyPr wrap="square" lIns="0" rIns="0" tIns="0" bIns="0" anchor="t">
+          <a:bodyPr wrap="square" lIns="0" tIns="0" rIns="0" bIns="0" anchor="t">
             <a:spAutoFit/>
           </a:bodyPr>
           <a:lstStyle/>
@@ -7249,7 +7346,9 @@
         <p:txBody>
           <a:bodyPr rtlCol="0" anchor="ctr"/>
           <a:lstStyle/>
-          <a:p/>
+          <a:p>
+            <a:endParaRPr/>
+          </a:p>
         </p:txBody>
       </p:sp>
       <p:sp>
@@ -7291,7 +7390,9 @@
         <p:txBody>
           <a:bodyPr rtlCol="0" anchor="ctr"/>
           <a:lstStyle/>
-          <a:p/>
+          <a:p>
+            <a:endParaRPr/>
+          </a:p>
         </p:txBody>
       </p:sp>
       <p:sp>
@@ -7311,7 +7412,7 @@
           <a:noFill/>
         </p:spPr>
         <p:txBody>
-          <a:bodyPr wrap="square" lIns="0" rIns="0" tIns="0" bIns="0" anchor="t">
+          <a:bodyPr wrap="square" lIns="0" tIns="0" rIns="0" bIns="0" anchor="t">
             <a:spAutoFit/>
           </a:bodyPr>
           <a:lstStyle/>
@@ -7346,7 +7447,7 @@
           <a:noFill/>
         </p:spPr>
         <p:txBody>
-          <a:bodyPr wrap="square" lIns="0" rIns="0" tIns="0" bIns="0" anchor="t">
+          <a:bodyPr wrap="square" lIns="0" tIns="0" rIns="0" bIns="0" anchor="t">
             <a:spAutoFit/>
           </a:bodyPr>
           <a:lstStyle/>
@@ -7381,7 +7482,7 @@
           <a:noFill/>
         </p:spPr>
         <p:txBody>
-          <a:bodyPr wrap="square" lIns="0" rIns="0" tIns="0" bIns="0" anchor="ctr">
+          <a:bodyPr wrap="square" lIns="0" tIns="0" rIns="0" bIns="0" anchor="ctr">
             <a:spAutoFit/>
           </a:bodyPr>
           <a:lstStyle/>
@@ -7416,7 +7517,7 @@
           <a:noFill/>
         </p:spPr>
         <p:txBody>
-          <a:bodyPr wrap="square" lIns="0" rIns="0" tIns="0" bIns="0" anchor="t">
+          <a:bodyPr wrap="square" lIns="0" tIns="0" rIns="0" bIns="0" anchor="t">
             <a:spAutoFit/>
           </a:bodyPr>
           <a:lstStyle/>
@@ -7451,7 +7552,7 @@
           <a:noFill/>
         </p:spPr>
         <p:txBody>
-          <a:bodyPr wrap="square" lIns="0" rIns="0" tIns="0" bIns="0" anchor="t">
+          <a:bodyPr wrap="square" lIns="0" tIns="0" rIns="0" bIns="0" anchor="t">
             <a:spAutoFit/>
           </a:bodyPr>
           <a:lstStyle/>
@@ -7486,7 +7587,7 @@
           <a:noFill/>
         </p:spPr>
         <p:txBody>
-          <a:bodyPr wrap="square" lIns="0" rIns="0" tIns="0" bIns="0" anchor="ctr">
+          <a:bodyPr wrap="square" lIns="0" tIns="0" rIns="0" bIns="0" anchor="ctr">
             <a:spAutoFit/>
           </a:bodyPr>
           <a:lstStyle/>
@@ -7521,7 +7622,7 @@
           <a:noFill/>
         </p:spPr>
         <p:txBody>
-          <a:bodyPr wrap="square" lIns="0" rIns="0" tIns="0" bIns="0" anchor="t">
+          <a:bodyPr wrap="square" lIns="0" tIns="0" rIns="0" bIns="0" anchor="t">
             <a:spAutoFit/>
           </a:bodyPr>
           <a:lstStyle/>
@@ -7556,7 +7657,7 @@
           <a:noFill/>
         </p:spPr>
         <p:txBody>
-          <a:bodyPr wrap="square" lIns="0" rIns="0" tIns="0" bIns="0" anchor="t">
+          <a:bodyPr wrap="square" lIns="0" tIns="0" rIns="0" bIns="0" anchor="t">
             <a:spAutoFit/>
           </a:bodyPr>
           <a:lstStyle/>
@@ -7591,7 +7692,7 @@
           <a:noFill/>
         </p:spPr>
         <p:txBody>
-          <a:bodyPr wrap="square" lIns="0" rIns="0" tIns="0" bIns="0" anchor="ctr">
+          <a:bodyPr wrap="square" lIns="0" tIns="0" rIns="0" bIns="0" anchor="ctr">
             <a:spAutoFit/>
           </a:bodyPr>
           <a:lstStyle/>
@@ -7626,7 +7727,7 @@
           <a:noFill/>
         </p:spPr>
         <p:txBody>
-          <a:bodyPr wrap="square" lIns="0" rIns="0" tIns="0" bIns="0" anchor="t">
+          <a:bodyPr wrap="square" lIns="0" tIns="0" rIns="0" bIns="0" anchor="t">
             <a:spAutoFit/>
           </a:bodyPr>
           <a:lstStyle/>
@@ -7661,7 +7762,7 @@
           <a:noFill/>
         </p:spPr>
         <p:txBody>
-          <a:bodyPr wrap="square" lIns="0" rIns="0" tIns="0" bIns="0" anchor="t">
+          <a:bodyPr wrap="square" lIns="0" tIns="0" rIns="0" bIns="0" anchor="t">
             <a:spAutoFit/>
           </a:bodyPr>
           <a:lstStyle/>
@@ -7696,7 +7797,7 @@
           <a:noFill/>
         </p:spPr>
         <p:txBody>
-          <a:bodyPr wrap="square" lIns="0" rIns="0" tIns="0" bIns="0" anchor="ctr">
+          <a:bodyPr wrap="square" lIns="0" tIns="0" rIns="0" bIns="0" anchor="ctr">
             <a:spAutoFit/>
           </a:bodyPr>
           <a:lstStyle/>
@@ -7749,7 +7850,7 @@
           <a:noFill/>
         </p:spPr>
         <p:txBody>
-          <a:bodyPr wrap="square" lIns="0" rIns="0" tIns="0" bIns="0" anchor="t">
+          <a:bodyPr wrap="square" lIns="0" tIns="0" rIns="0" bIns="0" anchor="t">
             <a:spAutoFit/>
           </a:bodyPr>
           <a:lstStyle/>
@@ -7784,7 +7885,7 @@
           <a:noFill/>
         </p:spPr>
         <p:txBody>
-          <a:bodyPr wrap="square" lIns="0" rIns="0" tIns="0" bIns="0" anchor="t">
+          <a:bodyPr wrap="square" lIns="0" tIns="0" rIns="0" bIns="0" anchor="t">
             <a:spAutoFit/>
           </a:bodyPr>
           <a:lstStyle/>
@@ -7841,7 +7942,9 @@
         <p:txBody>
           <a:bodyPr rtlCol="0" anchor="ctr"/>
           <a:lstStyle/>
-          <a:p/>
+          <a:p>
+            <a:endParaRPr/>
+          </a:p>
         </p:txBody>
       </p:sp>
       <p:sp>
@@ -7861,7 +7964,7 @@
           <a:noFill/>
         </p:spPr>
         <p:txBody>
-          <a:bodyPr wrap="square" lIns="0" rIns="0" tIns="0" bIns="0" anchor="t">
+          <a:bodyPr wrap="square" lIns="0" tIns="0" rIns="0" bIns="0" anchor="t">
             <a:spAutoFit/>
           </a:bodyPr>
           <a:lstStyle/>
@@ -7905,7 +8008,7 @@
           <a:noFill/>
         </p:spPr>
         <p:txBody>
-          <a:bodyPr wrap="square" lIns="0" rIns="0" tIns="0" bIns="0" anchor="t">
+          <a:bodyPr wrap="square" lIns="0" tIns="0" rIns="0" bIns="0" anchor="t">
             <a:spAutoFit/>
           </a:bodyPr>
           <a:lstStyle/>
@@ -7949,7 +8052,7 @@
           <a:noFill/>
         </p:spPr>
         <p:txBody>
-          <a:bodyPr wrap="square" lIns="0" rIns="0" tIns="0" bIns="0" anchor="t">
+          <a:bodyPr wrap="square" lIns="0" tIns="0" rIns="0" bIns="0" anchor="t">
             <a:spAutoFit/>
           </a:bodyPr>
           <a:lstStyle/>
@@ -7984,7 +8087,7 @@
           <a:noFill/>
         </p:spPr>
         <p:txBody>
-          <a:bodyPr wrap="square" lIns="0" rIns="0" tIns="0" bIns="0" anchor="t">
+          <a:bodyPr wrap="square" lIns="0" tIns="0" rIns="0" bIns="0" anchor="t">
             <a:spAutoFit/>
           </a:bodyPr>
           <a:lstStyle/>
@@ -8041,7 +8144,9 @@
         <p:txBody>
           <a:bodyPr rtlCol="0" anchor="ctr"/>
           <a:lstStyle/>
-          <a:p/>
+          <a:p>
+            <a:endParaRPr/>
+          </a:p>
         </p:txBody>
       </p:sp>
       <p:sp>
@@ -8061,7 +8166,7 @@
           <a:noFill/>
         </p:spPr>
         <p:txBody>
-          <a:bodyPr wrap="square" lIns="0" rIns="0" tIns="0" bIns="0" anchor="t">
+          <a:bodyPr wrap="square" lIns="0" tIns="0" rIns="0" bIns="0" anchor="t">
             <a:spAutoFit/>
           </a:bodyPr>
           <a:lstStyle/>
@@ -8105,7 +8210,7 @@
           <a:noFill/>
         </p:spPr>
         <p:txBody>
-          <a:bodyPr wrap="square" lIns="0" rIns="0" tIns="0" bIns="0" anchor="t">
+          <a:bodyPr wrap="square" lIns="0" tIns="0" rIns="0" bIns="0" anchor="t">
             <a:spAutoFit/>
           </a:bodyPr>
           <a:lstStyle/>
@@ -8149,7 +8254,7 @@
           <a:noFill/>
         </p:spPr>
         <p:txBody>
-          <a:bodyPr wrap="square" lIns="0" rIns="0" tIns="0" bIns="0" anchor="t">
+          <a:bodyPr wrap="square" lIns="0" tIns="0" rIns="0" bIns="0" anchor="t">
             <a:spAutoFit/>
           </a:bodyPr>
           <a:lstStyle/>
@@ -8184,7 +8289,7 @@
           <a:noFill/>
         </p:spPr>
         <p:txBody>
-          <a:bodyPr wrap="square" lIns="0" rIns="0" tIns="0" bIns="0" anchor="t">
+          <a:bodyPr wrap="square" lIns="0" tIns="0" rIns="0" bIns="0" anchor="t">
             <a:spAutoFit/>
           </a:bodyPr>
           <a:lstStyle/>
@@ -8241,7 +8346,9 @@
         <p:txBody>
           <a:bodyPr rtlCol="0" anchor="ctr"/>
           <a:lstStyle/>
-          <a:p/>
+          <a:p>
+            <a:endParaRPr/>
+          </a:p>
         </p:txBody>
       </p:sp>
     </p:spTree>
@@ -8253,7 +8360,7 @@
 </file>
 
 <file path=ppt/slides/slide6.xml><?xml version="1.0" encoding="utf-8"?>
-<p:sld xmlns:a="http://schemas.openxmlformats.org/drawingml/2006/main" xmlns:p="http://schemas.openxmlformats.org/presentationml/2006/main" xmlns:r="http://schemas.openxmlformats.org/officeDocument/2006/relationships">
+<p:sld xmlns:a="http://schemas.openxmlformats.org/drawingml/2006/main" xmlns:r="http://schemas.openxmlformats.org/officeDocument/2006/relationships" xmlns:p="http://schemas.openxmlformats.org/presentationml/2006/main">
   <p:cSld>
     <p:spTree>
       <p:nvGrpSpPr>
@@ -8261,7 +8368,14 @@
         <p:cNvGrpSpPr/>
         <p:nvPr/>
       </p:nvGrpSpPr>
-      <p:grpSpPr/>
+      <p:grpSpPr>
+        <a:xfrm>
+          <a:off x="0" y="0"/>
+          <a:ext cx="0" cy="0"/>
+          <a:chOff x="0" y="0"/>
+          <a:chExt cx="0" cy="0"/>
+        </a:xfrm>
+      </p:grpSpPr>
       <p:sp>
         <p:nvSpPr>
           <p:cNvPr id="2" name="TextBox 1"/>
@@ -8279,7 +8393,7 @@
           <a:noFill/>
         </p:spPr>
         <p:txBody>
-          <a:bodyPr wrap="square" lIns="0" rIns="0" tIns="0" bIns="0" anchor="t">
+          <a:bodyPr wrap="square" lIns="0" tIns="0" rIns="0" bIns="0" anchor="t">
             <a:spAutoFit/>
           </a:bodyPr>
           <a:lstStyle/>
@@ -8314,7 +8428,7 @@
           <a:noFill/>
         </p:spPr>
         <p:txBody>
-          <a:bodyPr wrap="square" lIns="0" rIns="0" tIns="0" bIns="0" anchor="t">
+          <a:bodyPr wrap="square" lIns="0" tIns="0" rIns="0" bIns="0" anchor="t">
             <a:spAutoFit/>
           </a:bodyPr>
           <a:lstStyle/>
@@ -8371,7 +8485,9 @@
         <p:txBody>
           <a:bodyPr rtlCol="0" anchor="ctr"/>
           <a:lstStyle/>
-          <a:p/>
+          <a:p>
+            <a:endParaRPr/>
+          </a:p>
         </p:txBody>
       </p:sp>
       <p:sp>
@@ -8413,7 +8529,9 @@
         <p:txBody>
           <a:bodyPr rtlCol="0" anchor="ctr"/>
           <a:lstStyle/>
-          <a:p/>
+          <a:p>
+            <a:endParaRPr/>
+          </a:p>
         </p:txBody>
       </p:sp>
       <p:sp>
@@ -8433,7 +8551,7 @@
           <a:noFill/>
         </p:spPr>
         <p:txBody>
-          <a:bodyPr wrap="square" lIns="0" rIns="0" tIns="0" bIns="0" anchor="t">
+          <a:bodyPr wrap="square" lIns="0" tIns="0" rIns="0" bIns="0" anchor="t">
             <a:spAutoFit/>
           </a:bodyPr>
           <a:lstStyle/>
@@ -8468,7 +8586,7 @@
           <a:noFill/>
         </p:spPr>
         <p:txBody>
-          <a:bodyPr wrap="square" lIns="0" rIns="0" tIns="0" bIns="0" anchor="t">
+          <a:bodyPr wrap="square" lIns="0" tIns="0" rIns="0" bIns="0" anchor="t">
             <a:spAutoFit/>
           </a:bodyPr>
           <a:lstStyle/>
@@ -8527,7 +8645,7 @@
           <a:noFill/>
         </p:spPr>
         <p:txBody>
-          <a:bodyPr wrap="square" lIns="0" rIns="0" tIns="0" bIns="0" anchor="t">
+          <a:bodyPr wrap="square" lIns="0" tIns="0" rIns="0" bIns="0" anchor="t">
             <a:spAutoFit/>
           </a:bodyPr>
           <a:lstStyle/>
@@ -8586,7 +8704,7 @@
           <a:noFill/>
         </p:spPr>
         <p:txBody>
-          <a:bodyPr wrap="square" lIns="0" rIns="0" tIns="0" bIns="0" anchor="t">
+          <a:bodyPr wrap="square" lIns="0" tIns="0" rIns="0" bIns="0" anchor="t">
             <a:spAutoFit/>
           </a:bodyPr>
           <a:lstStyle/>
@@ -8643,7 +8761,9 @@
         <p:txBody>
           <a:bodyPr rtlCol="0" anchor="ctr"/>
           <a:lstStyle/>
-          <a:p/>
+          <a:p>
+            <a:endParaRPr/>
+          </a:p>
         </p:txBody>
       </p:sp>
       <p:sp>
@@ -8685,7 +8805,9 @@
         <p:txBody>
           <a:bodyPr rtlCol="0" anchor="ctr"/>
           <a:lstStyle/>
-          <a:p/>
+          <a:p>
+            <a:endParaRPr/>
+          </a:p>
         </p:txBody>
       </p:sp>
       <p:sp>
@@ -8705,7 +8827,7 @@
           <a:noFill/>
         </p:spPr>
         <p:txBody>
-          <a:bodyPr wrap="square" lIns="0" rIns="0" tIns="0" bIns="0" anchor="ctr">
+          <a:bodyPr wrap="square" lIns="0" tIns="0" rIns="0" bIns="0" anchor="ctr">
             <a:spAutoFit/>
           </a:bodyPr>
           <a:lstStyle/>
@@ -8732,7 +8854,7 @@
 </file>
 
 <file path=ppt/slides/slide7.xml><?xml version="1.0" encoding="utf-8"?>
-<p:sld xmlns:a="http://schemas.openxmlformats.org/drawingml/2006/main" xmlns:p="http://schemas.openxmlformats.org/presentationml/2006/main" xmlns:r="http://schemas.openxmlformats.org/officeDocument/2006/relationships">
+<p:sld xmlns:a="http://schemas.openxmlformats.org/drawingml/2006/main" xmlns:r="http://schemas.openxmlformats.org/officeDocument/2006/relationships" xmlns:p="http://schemas.openxmlformats.org/presentationml/2006/main">
   <p:cSld>
     <p:spTree>
       <p:nvGrpSpPr>
@@ -8740,7 +8862,14 @@
         <p:cNvGrpSpPr/>
         <p:nvPr/>
       </p:nvGrpSpPr>
-      <p:grpSpPr/>
+      <p:grpSpPr>
+        <a:xfrm>
+          <a:off x="0" y="0"/>
+          <a:ext cx="0" cy="0"/>
+          <a:chOff x="0" y="0"/>
+          <a:chExt cx="0" cy="0"/>
+        </a:xfrm>
+      </p:grpSpPr>
       <p:sp>
         <p:nvSpPr>
           <p:cNvPr id="2" name="TextBox 1"/>
@@ -8758,7 +8887,7 @@
           <a:noFill/>
         </p:spPr>
         <p:txBody>
-          <a:bodyPr wrap="square" lIns="0" rIns="0" tIns="0" bIns="0" anchor="t">
+          <a:bodyPr wrap="square" lIns="0" tIns="0" rIns="0" bIns="0" anchor="t">
             <a:spAutoFit/>
           </a:bodyPr>
           <a:lstStyle/>
@@ -8793,7 +8922,7 @@
           <a:noFill/>
         </p:spPr>
         <p:txBody>
-          <a:bodyPr wrap="square" lIns="0" rIns="0" tIns="0" bIns="0" anchor="t">
+          <a:bodyPr wrap="square" lIns="0" tIns="0" rIns="0" bIns="0" anchor="t">
             <a:spAutoFit/>
           </a:bodyPr>
           <a:lstStyle/>
@@ -8850,7 +8979,9 @@
         <p:txBody>
           <a:bodyPr rtlCol="0" anchor="ctr"/>
           <a:lstStyle/>
-          <a:p/>
+          <a:p>
+            <a:endParaRPr/>
+          </a:p>
         </p:txBody>
       </p:sp>
       <p:sp>
@@ -8892,7 +9023,9 @@
         <p:txBody>
           <a:bodyPr rtlCol="0" anchor="ctr"/>
           <a:lstStyle/>
-          <a:p/>
+          <a:p>
+            <a:endParaRPr/>
+          </a:p>
         </p:txBody>
       </p:sp>
       <p:sp>
@@ -8912,7 +9045,7 @@
           <a:noFill/>
         </p:spPr>
         <p:txBody>
-          <a:bodyPr wrap="square" lIns="0" rIns="0" tIns="0" bIns="0" anchor="t">
+          <a:bodyPr wrap="square" lIns="0" tIns="0" rIns="0" bIns="0" anchor="t">
             <a:spAutoFit/>
           </a:bodyPr>
           <a:lstStyle/>
@@ -8947,7 +9080,7 @@
           <a:noFill/>
         </p:spPr>
         <p:txBody>
-          <a:bodyPr wrap="square" lIns="0" rIns="0" tIns="0" bIns="0" anchor="t">
+          <a:bodyPr wrap="square" lIns="0" tIns="0" rIns="0" bIns="0" anchor="t">
             <a:spAutoFit/>
           </a:bodyPr>
           <a:lstStyle/>
@@ -9006,7 +9139,7 @@
           <a:noFill/>
         </p:spPr>
         <p:txBody>
-          <a:bodyPr wrap="square" lIns="0" rIns="0" tIns="0" bIns="0" anchor="t">
+          <a:bodyPr wrap="square" lIns="0" tIns="0" rIns="0" bIns="0" anchor="t">
             <a:spAutoFit/>
           </a:bodyPr>
           <a:lstStyle/>
@@ -9059,7 +9192,7 @@
           <a:noFill/>
         </p:spPr>
         <p:txBody>
-          <a:bodyPr wrap="square" lIns="0" rIns="0" tIns="0" bIns="0" anchor="t">
+          <a:bodyPr wrap="square" lIns="0" tIns="0" rIns="0" bIns="0" anchor="t">
             <a:spAutoFit/>
           </a:bodyPr>
           <a:lstStyle/>
@@ -9136,7 +9269,7 @@
           <a:noFill/>
         </p:spPr>
         <p:txBody>
-          <a:bodyPr wrap="square" lIns="0" rIns="0" tIns="0" bIns="0" anchor="t">
+          <a:bodyPr wrap="square" lIns="0" tIns="0" rIns="0" bIns="0" anchor="t">
             <a:spAutoFit/>
           </a:bodyPr>
           <a:lstStyle/>
@@ -9189,7 +9322,7 @@
           <a:noFill/>
         </p:spPr>
         <p:txBody>
-          <a:bodyPr wrap="square" lIns="0" rIns="0" tIns="0" bIns="0" anchor="t">
+          <a:bodyPr wrap="square" lIns="0" tIns="0" rIns="0" bIns="0" anchor="t">
             <a:spAutoFit/>
           </a:bodyPr>
           <a:lstStyle/>
@@ -9242,7 +9375,7 @@
           <a:noFill/>
         </p:spPr>
         <p:txBody>
-          <a:bodyPr wrap="square" lIns="0" rIns="0" tIns="0" bIns="0" anchor="t">
+          <a:bodyPr wrap="square" lIns="0" tIns="0" rIns="0" bIns="0" anchor="t">
             <a:spAutoFit/>
           </a:bodyPr>
           <a:lstStyle/>
@@ -9269,7 +9402,7 @@
 </file>
 
 <file path=ppt/slides/slide8.xml><?xml version="1.0" encoding="utf-8"?>
-<p:sld xmlns:a="http://schemas.openxmlformats.org/drawingml/2006/main" xmlns:p="http://schemas.openxmlformats.org/presentationml/2006/main" xmlns:r="http://schemas.openxmlformats.org/officeDocument/2006/relationships">
+<p:sld xmlns:a="http://schemas.openxmlformats.org/drawingml/2006/main" xmlns:r="http://schemas.openxmlformats.org/officeDocument/2006/relationships" xmlns:p="http://schemas.openxmlformats.org/presentationml/2006/main">
   <p:cSld>
     <p:spTree>
       <p:nvGrpSpPr>
@@ -9277,7 +9410,14 @@
         <p:cNvGrpSpPr/>
         <p:nvPr/>
       </p:nvGrpSpPr>
-      <p:grpSpPr/>
+      <p:grpSpPr>
+        <a:xfrm>
+          <a:off x="0" y="0"/>
+          <a:ext cx="0" cy="0"/>
+          <a:chOff x="0" y="0"/>
+          <a:chExt cx="0" cy="0"/>
+        </a:xfrm>
+      </p:grpSpPr>
       <p:sp>
         <p:nvSpPr>
           <p:cNvPr id="2" name="TextBox 1"/>
@@ -9295,7 +9435,7 @@
           <a:noFill/>
         </p:spPr>
         <p:txBody>
-          <a:bodyPr wrap="square" lIns="0" rIns="0" tIns="0" bIns="0" anchor="t">
+          <a:bodyPr wrap="square" lIns="0" tIns="0" rIns="0" bIns="0" anchor="t">
             <a:spAutoFit/>
           </a:bodyPr>
           <a:lstStyle/>
@@ -9330,7 +9470,7 @@
           <a:noFill/>
         </p:spPr>
         <p:txBody>
-          <a:bodyPr wrap="square" lIns="0" rIns="0" tIns="0" bIns="0" anchor="t">
+          <a:bodyPr wrap="square" lIns="0" tIns="0" rIns="0" bIns="0" anchor="t">
             <a:spAutoFit/>
           </a:bodyPr>
           <a:lstStyle/>
@@ -9387,7 +9527,9 @@
         <p:txBody>
           <a:bodyPr rtlCol="0" anchor="ctr"/>
           <a:lstStyle/>
-          <a:p/>
+          <a:p>
+            <a:endParaRPr/>
+          </a:p>
         </p:txBody>
       </p:sp>
       <p:sp>
@@ -9429,7 +9571,9 @@
         <p:txBody>
           <a:bodyPr rtlCol="0" anchor="ctr"/>
           <a:lstStyle/>
-          <a:p/>
+          <a:p>
+            <a:endParaRPr/>
+          </a:p>
         </p:txBody>
       </p:sp>
       <p:sp>
@@ -9449,7 +9593,7 @@
           <a:noFill/>
         </p:spPr>
         <p:txBody>
-          <a:bodyPr wrap="square" lIns="0" rIns="0" tIns="0" bIns="0" anchor="t">
+          <a:bodyPr wrap="square" lIns="0" tIns="0" rIns="0" bIns="0" anchor="t">
             <a:spAutoFit/>
           </a:bodyPr>
           <a:lstStyle/>
@@ -9484,7 +9628,7 @@
           <a:noFill/>
         </p:spPr>
         <p:txBody>
-          <a:bodyPr wrap="square" lIns="0" rIns="0" tIns="0" bIns="0" anchor="t">
+          <a:bodyPr wrap="square" lIns="0" tIns="0" rIns="0" bIns="0" anchor="t">
             <a:spAutoFit/>
           </a:bodyPr>
           <a:lstStyle/>
@@ -9519,7 +9663,7 @@
           <a:noFill/>
         </p:spPr>
         <p:txBody>
-          <a:bodyPr wrap="square" lIns="0" rIns="0" tIns="0" bIns="0" anchor="t">
+          <a:bodyPr wrap="square" lIns="0" tIns="0" rIns="0" bIns="0" anchor="t">
             <a:spAutoFit/>
           </a:bodyPr>
           <a:lstStyle/>
@@ -9554,7 +9698,7 @@
           <a:noFill/>
         </p:spPr>
         <p:txBody>
-          <a:bodyPr wrap="square" lIns="0" rIns="0" tIns="0" bIns="0" anchor="t">
+          <a:bodyPr wrap="square" lIns="0" tIns="0" rIns="0" bIns="0" anchor="t">
             <a:spAutoFit/>
           </a:bodyPr>
           <a:lstStyle/>
@@ -9589,7 +9733,7 @@
           <a:noFill/>
         </p:spPr>
         <p:txBody>
-          <a:bodyPr wrap="square" lIns="0" rIns="0" tIns="0" bIns="0" anchor="t">
+          <a:bodyPr wrap="square" lIns="0" tIns="0" rIns="0" bIns="0" anchor="t">
             <a:spAutoFit/>
           </a:bodyPr>
           <a:lstStyle/>
@@ -9624,7 +9768,7 @@
           <a:noFill/>
         </p:spPr>
         <p:txBody>
-          <a:bodyPr wrap="square" lIns="0" rIns="0" tIns="0" bIns="0" anchor="t">
+          <a:bodyPr wrap="square" lIns="0" tIns="0" rIns="0" bIns="0" anchor="t">
             <a:spAutoFit/>
           </a:bodyPr>
           <a:lstStyle/>
@@ -9681,7 +9825,9 @@
         <p:txBody>
           <a:bodyPr rtlCol="0" anchor="ctr"/>
           <a:lstStyle/>
-          <a:p/>
+          <a:p>
+            <a:endParaRPr/>
+          </a:p>
         </p:txBody>
       </p:sp>
       <p:sp>
@@ -9701,7 +9847,7 @@
           <a:noFill/>
         </p:spPr>
         <p:txBody>
-          <a:bodyPr wrap="square" lIns="0" rIns="0" tIns="0" bIns="0" anchor="t">
+          <a:bodyPr wrap="square" lIns="0" tIns="0" rIns="0" bIns="0" anchor="t">
             <a:spAutoFit/>
           </a:bodyPr>
           <a:lstStyle/>
@@ -9736,7 +9882,7 @@
           <a:noFill/>
         </p:spPr>
         <p:txBody>
-          <a:bodyPr wrap="square" lIns="0" rIns="0" tIns="0" bIns="0" anchor="t">
+          <a:bodyPr wrap="square" lIns="0" tIns="0" rIns="0" bIns="0" anchor="t">
             <a:spAutoFit/>
           </a:bodyPr>
           <a:lstStyle/>
@@ -9793,7 +9939,9 @@
         <p:txBody>
           <a:bodyPr rtlCol="0" anchor="ctr"/>
           <a:lstStyle/>
-          <a:p/>
+          <a:p>
+            <a:endParaRPr/>
+          </a:p>
         </p:txBody>
       </p:sp>
       <p:sp>
@@ -9835,7 +9983,9 @@
         <p:txBody>
           <a:bodyPr rtlCol="0" anchor="ctr"/>
           <a:lstStyle/>
-          <a:p/>
+          <a:p>
+            <a:endParaRPr/>
+          </a:p>
         </p:txBody>
       </p:sp>
       <p:sp>
@@ -9855,7 +10005,7 @@
           <a:noFill/>
         </p:spPr>
         <p:txBody>
-          <a:bodyPr wrap="square" lIns="0" rIns="0" tIns="0" bIns="0" anchor="t">
+          <a:bodyPr wrap="square" lIns="0" tIns="0" rIns="0" bIns="0" anchor="t">
             <a:spAutoFit/>
           </a:bodyPr>
           <a:lstStyle/>
@@ -9912,7 +10062,9 @@
         <p:txBody>
           <a:bodyPr rtlCol="0" anchor="ctr"/>
           <a:lstStyle/>
-          <a:p/>
+          <a:p>
+            <a:endParaRPr/>
+          </a:p>
         </p:txBody>
       </p:sp>
       <p:sp>
@@ -9954,7 +10106,9 @@
         <p:txBody>
           <a:bodyPr rtlCol="0" anchor="ctr"/>
           <a:lstStyle/>
-          <a:p/>
+          <a:p>
+            <a:endParaRPr/>
+          </a:p>
         </p:txBody>
       </p:sp>
       <p:sp>
@@ -9974,7 +10128,7 @@
           <a:noFill/>
         </p:spPr>
         <p:txBody>
-          <a:bodyPr wrap="square" lIns="0" rIns="0" tIns="0" bIns="0" anchor="t">
+          <a:bodyPr wrap="square" lIns="0" tIns="0" rIns="0" bIns="0" anchor="t">
             <a:spAutoFit/>
           </a:bodyPr>
           <a:lstStyle/>
@@ -10031,7 +10185,9 @@
         <p:txBody>
           <a:bodyPr rtlCol="0" anchor="ctr"/>
           <a:lstStyle/>
-          <a:p/>
+          <a:p>
+            <a:endParaRPr/>
+          </a:p>
         </p:txBody>
       </p:sp>
       <p:sp>
@@ -10073,7 +10229,9 @@
         <p:txBody>
           <a:bodyPr rtlCol="0" anchor="ctr"/>
           <a:lstStyle/>
-          <a:p/>
+          <a:p>
+            <a:endParaRPr/>
+          </a:p>
         </p:txBody>
       </p:sp>
       <p:sp>
@@ -10115,7 +10273,9 @@
         <p:txBody>
           <a:bodyPr rtlCol="0" anchor="ctr"/>
           <a:lstStyle/>
-          <a:p/>
+          <a:p>
+            <a:endParaRPr/>
+          </a:p>
         </p:txBody>
       </p:sp>
       <p:sp>
@@ -10135,7 +10295,7 @@
           <a:noFill/>
         </p:spPr>
         <p:txBody>
-          <a:bodyPr wrap="square" lIns="0" rIns="0" tIns="0" bIns="0" anchor="t">
+          <a:bodyPr wrap="square" lIns="0" tIns="0" rIns="0" bIns="0" anchor="t">
             <a:spAutoFit/>
           </a:bodyPr>
           <a:lstStyle/>
@@ -10170,7 +10330,7 @@
           <a:noFill/>
         </p:spPr>
         <p:txBody>
-          <a:bodyPr wrap="square" lIns="0" rIns="0" tIns="0" bIns="0" anchor="t">
+          <a:bodyPr wrap="square" lIns="0" tIns="0" rIns="0" bIns="0" anchor="t">
             <a:spAutoFit/>
           </a:bodyPr>
           <a:lstStyle/>
@@ -10227,7 +10387,9 @@
         <p:txBody>
           <a:bodyPr rtlCol="0" anchor="ctr"/>
           <a:lstStyle/>
-          <a:p/>
+          <a:p>
+            <a:endParaRPr/>
+          </a:p>
         </p:txBody>
       </p:sp>
       <p:sp>
@@ -10269,7 +10431,9 @@
         <p:txBody>
           <a:bodyPr rtlCol="0" anchor="ctr"/>
           <a:lstStyle/>
-          <a:p/>
+          <a:p>
+            <a:endParaRPr/>
+          </a:p>
         </p:txBody>
       </p:sp>
       <p:sp>
@@ -10289,7 +10453,7 @@
           <a:noFill/>
         </p:spPr>
         <p:txBody>
-          <a:bodyPr wrap="square" lIns="0" rIns="0" tIns="0" bIns="0" anchor="t">
+          <a:bodyPr wrap="square" lIns="0" tIns="0" rIns="0" bIns="0" anchor="t">
             <a:spAutoFit/>
           </a:bodyPr>
           <a:lstStyle/>
@@ -10346,7 +10510,9 @@
         <p:txBody>
           <a:bodyPr rtlCol="0" anchor="ctr"/>
           <a:lstStyle/>
-          <a:p/>
+          <a:p>
+            <a:endParaRPr/>
+          </a:p>
         </p:txBody>
       </p:sp>
       <p:sp>
@@ -10388,7 +10554,9 @@
         <p:txBody>
           <a:bodyPr rtlCol="0" anchor="ctr"/>
           <a:lstStyle/>
-          <a:p/>
+          <a:p>
+            <a:endParaRPr/>
+          </a:p>
         </p:txBody>
       </p:sp>
       <p:sp>
@@ -10408,7 +10576,7 @@
           <a:noFill/>
         </p:spPr>
         <p:txBody>
-          <a:bodyPr wrap="square" lIns="0" rIns="0" tIns="0" bIns="0" anchor="t">
+          <a:bodyPr wrap="square" lIns="0" tIns="0" rIns="0" bIns="0" anchor="t">
             <a:spAutoFit/>
           </a:bodyPr>
           <a:lstStyle/>
@@ -10465,7 +10633,9 @@
         <p:txBody>
           <a:bodyPr rtlCol="0" anchor="ctr"/>
           <a:lstStyle/>
-          <a:p/>
+          <a:p>
+            <a:endParaRPr/>
+          </a:p>
         </p:txBody>
       </p:sp>
       <p:sp>
@@ -10507,7 +10677,9 @@
         <p:txBody>
           <a:bodyPr rtlCol="0" anchor="ctr"/>
           <a:lstStyle/>
-          <a:p/>
+          <a:p>
+            <a:endParaRPr/>
+          </a:p>
         </p:txBody>
       </p:sp>
       <p:sp>
@@ -10549,7 +10721,9 @@
         <p:txBody>
           <a:bodyPr rtlCol="0" anchor="ctr"/>
           <a:lstStyle/>
-          <a:p/>
+          <a:p>
+            <a:endParaRPr/>
+          </a:p>
         </p:txBody>
       </p:sp>
       <p:sp>
@@ -10569,7 +10743,7 @@
           <a:noFill/>
         </p:spPr>
         <p:txBody>
-          <a:bodyPr wrap="square" lIns="0" rIns="0" tIns="0" bIns="0" anchor="t">
+          <a:bodyPr wrap="square" lIns="0" tIns="0" rIns="0" bIns="0" anchor="t">
             <a:spAutoFit/>
           </a:bodyPr>
           <a:lstStyle/>
@@ -10604,7 +10778,7 @@
           <a:noFill/>
         </p:spPr>
         <p:txBody>
-          <a:bodyPr wrap="square" lIns="0" rIns="0" tIns="0" bIns="0" anchor="t">
+          <a:bodyPr wrap="square" lIns="0" tIns="0" rIns="0" bIns="0" anchor="t">
             <a:spAutoFit/>
           </a:bodyPr>
           <a:lstStyle/>
@@ -10661,7 +10835,9 @@
         <p:txBody>
           <a:bodyPr rtlCol="0" anchor="ctr"/>
           <a:lstStyle/>
-          <a:p/>
+          <a:p>
+            <a:endParaRPr/>
+          </a:p>
         </p:txBody>
       </p:sp>
       <p:sp>
@@ -10703,7 +10879,9 @@
         <p:txBody>
           <a:bodyPr rtlCol="0" anchor="ctr"/>
           <a:lstStyle/>
-          <a:p/>
+          <a:p>
+            <a:endParaRPr/>
+          </a:p>
         </p:txBody>
       </p:sp>
       <p:sp>
@@ -10723,7 +10901,7 @@
           <a:noFill/>
         </p:spPr>
         <p:txBody>
-          <a:bodyPr wrap="square" lIns="0" rIns="0" tIns="0" bIns="0" anchor="t">
+          <a:bodyPr wrap="square" lIns="0" tIns="0" rIns="0" bIns="0" anchor="t">
             <a:spAutoFit/>
           </a:bodyPr>
           <a:lstStyle/>
@@ -10780,7 +10958,9 @@
         <p:txBody>
           <a:bodyPr rtlCol="0" anchor="ctr"/>
           <a:lstStyle/>
-          <a:p/>
+          <a:p>
+            <a:endParaRPr/>
+          </a:p>
         </p:txBody>
       </p:sp>
       <p:sp>
@@ -10822,7 +11002,9 @@
         <p:txBody>
           <a:bodyPr rtlCol="0" anchor="ctr"/>
           <a:lstStyle/>
-          <a:p/>
+          <a:p>
+            <a:endParaRPr/>
+          </a:p>
         </p:txBody>
       </p:sp>
       <p:sp>
@@ -10842,7 +11024,7 @@
           <a:noFill/>
         </p:spPr>
         <p:txBody>
-          <a:bodyPr wrap="square" lIns="0" rIns="0" tIns="0" bIns="0" anchor="t">
+          <a:bodyPr wrap="square" lIns="0" tIns="0" rIns="0" bIns="0" anchor="t">
             <a:spAutoFit/>
           </a:bodyPr>
           <a:lstStyle/>
@@ -10899,7 +11081,9 @@
         <p:txBody>
           <a:bodyPr rtlCol="0" anchor="ctr"/>
           <a:lstStyle/>
-          <a:p/>
+          <a:p>
+            <a:endParaRPr/>
+          </a:p>
         </p:txBody>
       </p:sp>
       <p:sp>
@@ -10941,7 +11125,9 @@
         <p:txBody>
           <a:bodyPr rtlCol="0" anchor="ctr"/>
           <a:lstStyle/>
-          <a:p/>
+          <a:p>
+            <a:endParaRPr/>
+          </a:p>
         </p:txBody>
       </p:sp>
       <p:sp>
@@ -10983,7 +11169,9 @@
         <p:txBody>
           <a:bodyPr rtlCol="0" anchor="ctr"/>
           <a:lstStyle/>
-          <a:p/>
+          <a:p>
+            <a:endParaRPr/>
+          </a:p>
         </p:txBody>
       </p:sp>
       <p:sp>
@@ -11025,7 +11213,9 @@
         <p:txBody>
           <a:bodyPr rtlCol="0" anchor="ctr"/>
           <a:lstStyle/>
-          <a:p/>
+          <a:p>
+            <a:endParaRPr/>
+          </a:p>
         </p:txBody>
       </p:sp>
       <p:sp>
@@ -11045,7 +11235,7 @@
           <a:noFill/>
         </p:spPr>
         <p:txBody>
-          <a:bodyPr wrap="square" lIns="0" rIns="0" tIns="0" bIns="0" anchor="ctr">
+          <a:bodyPr wrap="square" lIns="0" tIns="0" rIns="0" bIns="0" anchor="ctr">
             <a:spAutoFit/>
           </a:bodyPr>
           <a:lstStyle/>
@@ -11072,7 +11262,7 @@
 </file>
 
 <file path=ppt/slides/slide9.xml><?xml version="1.0" encoding="utf-8"?>
-<p:sld xmlns:a="http://schemas.openxmlformats.org/drawingml/2006/main" xmlns:p="http://schemas.openxmlformats.org/presentationml/2006/main" xmlns:r="http://schemas.openxmlformats.org/officeDocument/2006/relationships">
+<p:sld xmlns:a="http://schemas.openxmlformats.org/drawingml/2006/main" xmlns:r="http://schemas.openxmlformats.org/officeDocument/2006/relationships" xmlns:p="http://schemas.openxmlformats.org/presentationml/2006/main">
   <p:cSld>
     <p:spTree>
       <p:nvGrpSpPr>
@@ -11080,7 +11270,14 @@
         <p:cNvGrpSpPr/>
         <p:nvPr/>
       </p:nvGrpSpPr>
-      <p:grpSpPr/>
+      <p:grpSpPr>
+        <a:xfrm>
+          <a:off x="0" y="0"/>
+          <a:ext cx="0" cy="0"/>
+          <a:chOff x="0" y="0"/>
+          <a:chExt cx="0" cy="0"/>
+        </a:xfrm>
+      </p:grpSpPr>
       <p:sp>
         <p:nvSpPr>
           <p:cNvPr id="2" name="TextBox 1"/>
@@ -11098,7 +11295,7 @@
           <a:noFill/>
         </p:spPr>
         <p:txBody>
-          <a:bodyPr wrap="square" lIns="0" rIns="0" tIns="0" bIns="0" anchor="t">
+          <a:bodyPr wrap="square" lIns="0" tIns="0" rIns="0" bIns="0" anchor="t">
             <a:spAutoFit/>
           </a:bodyPr>
           <a:lstStyle/>
@@ -11133,7 +11330,7 @@
           <a:noFill/>
         </p:spPr>
         <p:txBody>
-          <a:bodyPr wrap="square" lIns="0" rIns="0" tIns="0" bIns="0" anchor="t">
+          <a:bodyPr wrap="square" lIns="0" tIns="0" rIns="0" bIns="0" anchor="t">
             <a:spAutoFit/>
           </a:bodyPr>
           <a:lstStyle/>
@@ -11190,7 +11387,9 @@
         <p:txBody>
           <a:bodyPr rtlCol="0" anchor="ctr"/>
           <a:lstStyle/>
-          <a:p/>
+          <a:p>
+            <a:endParaRPr/>
+          </a:p>
         </p:txBody>
       </p:sp>
       <p:sp>
@@ -11232,7 +11431,9 @@
         <p:txBody>
           <a:bodyPr rtlCol="0" anchor="ctr"/>
           <a:lstStyle/>
-          <a:p/>
+          <a:p>
+            <a:endParaRPr/>
+          </a:p>
         </p:txBody>
       </p:sp>
       <p:sp>
@@ -11252,7 +11453,7 @@
           <a:noFill/>
         </p:spPr>
         <p:txBody>
-          <a:bodyPr wrap="square" lIns="0" rIns="0" tIns="0" bIns="0" anchor="t">
+          <a:bodyPr wrap="square" lIns="0" tIns="0" rIns="0" bIns="0" anchor="t">
             <a:spAutoFit/>
           </a:bodyPr>
           <a:lstStyle/>
@@ -11287,7 +11488,7 @@
           <a:noFill/>
         </p:spPr>
         <p:txBody>
-          <a:bodyPr wrap="square" lIns="0" rIns="0" tIns="0" bIns="0" anchor="t">
+          <a:bodyPr wrap="square" lIns="0" tIns="0" rIns="0" bIns="0" anchor="t">
             <a:spAutoFit/>
           </a:bodyPr>
           <a:lstStyle/>
@@ -11322,7 +11523,7 @@
           <a:noFill/>
         </p:spPr>
         <p:txBody>
-          <a:bodyPr wrap="square" lIns="0" rIns="0" tIns="0" bIns="0" anchor="t">
+          <a:bodyPr wrap="square" lIns="0" tIns="0" rIns="0" bIns="0" anchor="t">
             <a:spAutoFit/>
           </a:bodyPr>
           <a:lstStyle/>
@@ -11379,7 +11580,9 @@
         <p:txBody>
           <a:bodyPr rtlCol="0" anchor="ctr"/>
           <a:lstStyle/>
-          <a:p/>
+          <a:p>
+            <a:endParaRPr/>
+          </a:p>
         </p:txBody>
       </p:sp>
       <p:sp>
@@ -11421,7 +11624,9 @@
         <p:txBody>
           <a:bodyPr rtlCol="0" anchor="ctr"/>
           <a:lstStyle/>
-          <a:p/>
+          <a:p>
+            <a:endParaRPr/>
+          </a:p>
         </p:txBody>
       </p:sp>
       <p:sp>
@@ -11441,7 +11646,7 @@
           <a:noFill/>
         </p:spPr>
         <p:txBody>
-          <a:bodyPr wrap="square" lIns="0" rIns="0" tIns="0" bIns="0" anchor="t">
+          <a:bodyPr wrap="square" lIns="0" tIns="0" rIns="0" bIns="0" anchor="t">
             <a:spAutoFit/>
           </a:bodyPr>
           <a:lstStyle/>
@@ -11502,7 +11707,9 @@
         <p:txBody>
           <a:bodyPr rtlCol="0" anchor="ctr"/>
           <a:lstStyle/>
-          <a:p/>
+          <a:p>
+            <a:endParaRPr/>
+          </a:p>
         </p:txBody>
       </p:sp>
       <p:sp>
@@ -11522,7 +11729,7 @@
           <a:noFill/>
         </p:spPr>
         <p:txBody>
-          <a:bodyPr wrap="square" lIns="0" rIns="0" tIns="0" bIns="0" anchor="t">
+          <a:bodyPr wrap="square" lIns="0" tIns="0" rIns="0" bIns="0" anchor="t">
             <a:spAutoFit/>
           </a:bodyPr>
           <a:lstStyle/>
@@ -11583,7 +11790,9 @@
         <p:txBody>
           <a:bodyPr rtlCol="0" anchor="ctr"/>
           <a:lstStyle/>
-          <a:p/>
+          <a:p>
+            <a:endParaRPr/>
+          </a:p>
         </p:txBody>
       </p:sp>
       <p:sp>
@@ -11603,7 +11812,7 @@
           <a:noFill/>
         </p:spPr>
         <p:txBody>
-          <a:bodyPr wrap="square" lIns="0" rIns="0" tIns="0" bIns="0" anchor="t">
+          <a:bodyPr wrap="square" lIns="0" tIns="0" rIns="0" bIns="0" anchor="t">
             <a:spAutoFit/>
           </a:bodyPr>
           <a:lstStyle/>
@@ -11664,7 +11873,9 @@
         <p:txBody>
           <a:bodyPr rtlCol="0" anchor="ctr"/>
           <a:lstStyle/>
-          <a:p/>
+          <a:p>
+            <a:endParaRPr/>
+          </a:p>
         </p:txBody>
       </p:sp>
       <p:sp>
@@ -11684,7 +11895,7 @@
           <a:noFill/>
         </p:spPr>
         <p:txBody>
-          <a:bodyPr wrap="square" lIns="0" rIns="0" tIns="0" bIns="0" anchor="t">
+          <a:bodyPr wrap="square" lIns="0" tIns="0" rIns="0" bIns="0" anchor="t">
             <a:spAutoFit/>
           </a:bodyPr>
           <a:lstStyle/>
@@ -11723,7 +11934,7 @@
           <a:noFill/>
         </p:spPr>
         <p:txBody>
-          <a:bodyPr wrap="square" lIns="0" rIns="0" tIns="0" bIns="0" anchor="t">
+          <a:bodyPr wrap="square" lIns="0" tIns="0" rIns="0" bIns="0" anchor="t">
             <a:spAutoFit/>
           </a:bodyPr>
           <a:lstStyle/>
@@ -11780,7 +11991,9 @@
         <p:txBody>
           <a:bodyPr rtlCol="0" anchor="ctr"/>
           <a:lstStyle/>
-          <a:p/>
+          <a:p>
+            <a:endParaRPr/>
+          </a:p>
         </p:txBody>
       </p:sp>
       <p:sp>
@@ -11822,7 +12035,9 @@
         <p:txBody>
           <a:bodyPr rtlCol="0" anchor="ctr"/>
           <a:lstStyle/>
-          <a:p/>
+          <a:p>
+            <a:endParaRPr/>
+          </a:p>
         </p:txBody>
       </p:sp>
       <p:sp>
@@ -11842,7 +12057,7 @@
           <a:noFill/>
         </p:spPr>
         <p:txBody>
-          <a:bodyPr wrap="square" lIns="0" rIns="0" tIns="0" bIns="0" anchor="t">
+          <a:bodyPr wrap="square" lIns="0" tIns="0" rIns="0" bIns="0" anchor="t">
             <a:spAutoFit/>
           </a:bodyPr>
           <a:lstStyle/>
@@ -11903,7 +12118,9 @@
         <p:txBody>
           <a:bodyPr rtlCol="0" anchor="ctr"/>
           <a:lstStyle/>
-          <a:p/>
+          <a:p>
+            <a:endParaRPr/>
+          </a:p>
         </p:txBody>
       </p:sp>
       <p:sp>
@@ -11923,7 +12140,7 @@
           <a:noFill/>
         </p:spPr>
         <p:txBody>
-          <a:bodyPr wrap="square" lIns="0" rIns="0" tIns="0" bIns="0" anchor="t">
+          <a:bodyPr wrap="square" lIns="0" tIns="0" rIns="0" bIns="0" anchor="t">
             <a:spAutoFit/>
           </a:bodyPr>
           <a:lstStyle/>
@@ -11984,7 +12201,9 @@
         <p:txBody>
           <a:bodyPr rtlCol="0" anchor="ctr"/>
           <a:lstStyle/>
-          <a:p/>
+          <a:p>
+            <a:endParaRPr/>
+          </a:p>
         </p:txBody>
       </p:sp>
       <p:sp>
@@ -12004,7 +12223,7 @@
           <a:noFill/>
         </p:spPr>
         <p:txBody>
-          <a:bodyPr wrap="square" lIns="0" rIns="0" tIns="0" bIns="0" anchor="t">
+          <a:bodyPr wrap="square" lIns="0" tIns="0" rIns="0" bIns="0" anchor="t">
             <a:spAutoFit/>
           </a:bodyPr>
           <a:lstStyle/>
@@ -12065,7 +12284,9 @@
         <p:txBody>
           <a:bodyPr rtlCol="0" anchor="ctr"/>
           <a:lstStyle/>
-          <a:p/>
+          <a:p>
+            <a:endParaRPr/>
+          </a:p>
         </p:txBody>
       </p:sp>
       <p:sp>
@@ -12085,7 +12306,7 @@
           <a:noFill/>
         </p:spPr>
         <p:txBody>
-          <a:bodyPr wrap="square" lIns="0" rIns="0" tIns="0" bIns="0" anchor="t">
+          <a:bodyPr wrap="square" lIns="0" tIns="0" rIns="0" bIns="0" anchor="t">
             <a:spAutoFit/>
           </a:bodyPr>
           <a:lstStyle/>
@@ -12146,7 +12367,9 @@
         <p:txBody>
           <a:bodyPr rtlCol="0" anchor="ctr"/>
           <a:lstStyle/>
-          <a:p/>
+          <a:p>
+            <a:endParaRPr/>
+          </a:p>
         </p:txBody>
       </p:sp>
     </p:spTree>

--- a/presentation/probability-statistics-course-presentation.pptx
+++ b/presentation/probability-statistics-course-presentation.pptx
@@ -3280,8 +3280,8 @@
         </p:nvSpPr>
         <p:spPr>
           <a:xfrm>
-            <a:off x="2138650" y="4536369"/>
-            <a:ext cx="5074920" cy="592470"/>
+            <a:off x="2138650" y="4462431"/>
+            <a:ext cx="2100000" cy="800100"/>
           </a:xfrm>
           <a:prstGeom prst="rect">
             <a:avLst/>
@@ -3314,7 +3314,7 @@
                 </a:solidFill>
                 <a:latin typeface="微软雅黑"/>
               </a:rPr>
-              <a:t>赵浩（U202541916）　</a:t>
+              <a:t>赵浩（U202541916）</a:t>
             </a:r>
             <a:endParaRPr lang="en-US" sz="1400" b="0" dirty="0">
               <a:solidFill>
@@ -3335,6 +3335,18 @@
               <a:t>张璐玺（U202541915）</a:t>
             </a:r>
           </a:p>
+          <a:p>
+            <a:pPr algn="l"/>
+            <a:r>
+              <a:rPr sz="1102" b="0" dirty="0">
+                <a:solidFill>
+                  <a:srgbClr val="14263C"/>
+                </a:solidFill>
+                <a:latin typeface="微软雅黑"/>
+              </a:rPr>
+              <a:t>章轩睿（U202541911）</a:t>
+            </a:r>
+          </a:p>
         </p:txBody>
       </p:sp>
       <p:sp>
@@ -3345,7 +3357,7 @@
         </p:nvSpPr>
         <p:spPr>
           <a:xfrm>
-            <a:off x="6201140" y="4590288"/>
+            <a:off x="5098697" y="4620165"/>
             <a:ext cx="10972" cy="484632"/>
           </a:xfrm>
           <a:prstGeom prst="rect">
@@ -3389,8 +3401,8 @@
         </p:nvSpPr>
         <p:spPr>
           <a:xfrm>
-            <a:off x="7608764" y="4428141"/>
-            <a:ext cx="1874519" cy="868680"/>
+            <a:off x="6120583" y="4428141"/>
+            <a:ext cx="950000" cy="868680"/>
           </a:xfrm>
           <a:prstGeom prst="rect">
             <a:avLst/>
@@ -3426,7 +3438,7 @@
           <a:p>
             <a:pPr algn="l"/>
             <a:r>
-              <a:rPr sz="1700" b="1" dirty="0" err="1">
+              <a:rPr sz="1102" b="1" dirty="0" err="1">
                 <a:solidFill>
                   <a:srgbClr val="1B3A6B"/>
                 </a:solidFill>
@@ -3445,13 +3457,66 @@
       </p:sp>
       <p:sp>
         <p:nvSpPr>
+          <p:cNvPr id="9" name="TextBox 10"/>
+          <p:cNvSpPr txBox="1"/>
+          <p:nvPr/>
+        </p:nvSpPr>
+        <p:spPr>
+          <a:xfrm>
+            <a:off x="8790110" y="4428141"/>
+            <a:ext cx="1300000" cy="868680"/>
+          </a:xfrm>
+          <a:prstGeom prst="rect">
+            <a:avLst/>
+          </a:prstGeom>
+          <a:noFill/>
+        </p:spPr>
+        <p:txBody>
+          <a:bodyPr wrap="square" lIns="0" tIns="0" rIns="0" bIns="0" anchor="ctr">
+            <a:spAutoFit/>
+          </a:bodyPr>
+          <a:lstStyle/>
+          <a:p>
+            <a:pPr algn="l"/>
+            <a:r>
+              <a:rPr sz="826" b="0" dirty="0" err="1">
+                <a:solidFill>
+                  <a:srgbClr val="6E7A8A"/>
+                </a:solidFill>
+                <a:latin typeface="微软雅黑"/>
+              </a:rPr>
+              <a:t>日　期</a:t>
+            </a:r>
+          </a:p>
+          <a:p>
+            <a:pPr algn="l"/>
+            <a:r>
+              <a:rPr sz="1102" b="0" dirty="0" err="1">
+                <a:solidFill>
+                  <a:srgbClr val="14263C"/>
+                </a:solidFill>
+                <a:latin typeface="微软雅黑"/>
+              </a:rPr>
+              <a:t>2026年9月26日</a:t>
+            </a:r>
+            <a:endParaRPr sz="1700" b="1" dirty="0">
+              <a:solidFill>
+                <a:srgbClr val="1B3A6B"/>
+              </a:solidFill>
+              <a:latin typeface="微软雅黑"/>
+            </a:endParaRPr>
+          </a:p>
+        </p:txBody>
+      </p:sp>
+      <p:sp>
+        <p:nvSpPr>
           <p:cNvPr id="10" name="Rectangle 9"/>
           <p:cNvSpPr/>
           <p:nvPr/>
         </p:nvSpPr>
         <p:spPr>
           <a:xfrm>
-            <a:off x="8306089" y="4590288"/>
+            <a:off x="7768224" y="4620165"/>
             <a:ext cx="10972" cy="484632"/>
           </a:xfrm>
           <a:prstGeom prst="rect">
